--- a/delphi-overview/delphi-overview.pptx
+++ b/delphi-overview/delphi-overview.pptx
@@ -14,9 +14,12 @@
     <p:sldId id="262" r:id="rId8"/>
     <p:sldId id="263" r:id="rId9"/>
     <p:sldId id="264" r:id="rId10"/>
+    <p:sldId id="265" r:id="rId11"/>
+    <p:sldId id="266" r:id="rId12"/>
+    <p:sldId id="267" r:id="rId13"/>
   </p:sldIdLst>
   <p:notesMasterIdLst>
-    <p:notesMasterId r:id="rId11"/>
+    <p:notesMasterId r:id="rId14"/>
   </p:notesMasterIdLst>
   <p:sldSz cx="9144000" cy="5143500"/>
   <p:notesSz cx="5143500" cy="9144000"/>
@@ -510,7 +513,7 @@
           <a:p>
             <a:r>
               <a:rPr lang="en-US" dirty="0"/>
-              <a:t/>
+              <a:t>Delphi is where NER keeps the context our coding agents work from: instructions, skills, docs and settings. This deck follows one workspace, argos-dev, and answers two questions: where does each thing in your checkout come from, and how does an improvement get back to everyone?</a:t>
             </a:r>
             <a:endParaRPr lang="en-US" dirty="0"/>
           </a:p>
@@ -534,6 +537,270 @@
             <a:fld id="{F7021451-1387-4CA6-816F-3879F97B5CBC}" type="slidenum">
               <a:rPr lang="en-US"/>
               <a:t>1</a:t>
+            </a:fld>
+            <a:endParaRPr lang="en-US"/>
+          </a:p>
+        </p:txBody>
+      </p:sp>
+    </p:spTree>
+    <p:extLst>
+      <p:ext uri="{BB962C8B-B14F-4D97-AF65-F5344CB8AC3E}">
+        <p14:creationId xmlns:p14="http://schemas.microsoft.com/office/powerpoint/2010/main" val="1024086991"/>
+      </p:ext>
+    </p:extLst>
+  </p:cSld>
+  <p:clrMapOvr>
+    <a:masterClrMapping/>
+  </p:clrMapOvr>
+</p:notes>
+</file>
+
+<file path=ppt/notesSlides/notesSlide10.xml><?xml version="1.0" encoding="utf-8"?>
+<p:notes xmlns:a="http://schemas.openxmlformats.org/drawingml/2006/main" xmlns:r="http://schemas.openxmlformats.org/officeDocument/2006/relationships" xmlns:p="http://schemas.openxmlformats.org/presentationml/2006/main">
+  <p:cSld>
+    <p:spTree>
+      <p:nvGrpSpPr>
+        <p:cNvPr id="1" name=""/>
+        <p:cNvGrpSpPr/>
+        <p:nvPr/>
+      </p:nvGrpSpPr>
+      <p:grpSpPr>
+        <a:xfrm>
+          <a:off x="0" y="0"/>
+          <a:ext cx="0" cy="0"/>
+          <a:chOff x="0" y="0"/>
+          <a:chExt cx="0" cy="0"/>
+        </a:xfrm>
+      </p:grpSpPr>
+      <p:sp>
+        <p:nvSpPr>
+          <p:cNvPr id="2" name="Slide Image Placeholder 1"/>
+          <p:cNvSpPr>
+            <a:spLocks noGrp="1" noRot="1" noChangeAspect="1"/>
+          </p:cNvSpPr>
+          <p:nvPr>
+            <p:ph type="sldImg"/>
+          </p:nvPr>
+        </p:nvSpPr>
+        <p:spPr/>
+      </p:sp>
+      <p:sp>
+        <p:nvSpPr>
+          <p:cNvPr id="3" name="Notes Placeholder 2"/>
+          <p:cNvSpPr>
+            <a:spLocks noGrp="1"/>
+          </p:cNvSpPr>
+          <p:nvPr>
+            <p:ph type="body" idx="1"/>
+          </p:nvPr>
+        </p:nvSpPr>
+        <p:spPr/>
+        <p:txBody>
+          <a:bodyPr/>
+          <a:lstStyle/>
+          <a:p>
+            <a:r>
+              <a:rPr lang="en-US" dirty="0"/>
+              <a:t>To pull something new in, edit workspace.yml (the setup-workspace skill knows the format) and re-run setup.sh; the new folders appear and stay git-ignored. Because workspace.yml is shared, PR the change into ws/&lt;name&gt; so teammates get it on their next setup. A plugin set takes effect once CI regenerates settings.json on the branch. For a one-off look, add the entry, run setup, then git restore workspace.yml. The entries here are examples.</a:t>
+            </a:r>
+            <a:endParaRPr lang="en-US" dirty="0"/>
+          </a:p>
+        </p:txBody>
+      </p:sp>
+      <p:sp>
+        <p:nvSpPr>
+          <p:cNvPr id="4" name="Slide Number Placeholder 3"/>
+          <p:cNvSpPr>
+            <a:spLocks noGrp="1"/>
+          </p:cNvSpPr>
+          <p:nvPr>
+            <p:ph type="sldNum" sz="quarter" idx="10"/>
+          </p:nvPr>
+        </p:nvSpPr>
+        <p:spPr/>
+        <p:txBody>
+          <a:bodyPr/>
+          <a:lstStyle/>
+          <a:p>
+            <a:fld id="{F7021451-1387-4CA6-816F-3879F97B5CBC}" type="slidenum">
+              <a:rPr lang="en-US"/>
+              <a:t>10</a:t>
+            </a:fld>
+            <a:endParaRPr lang="en-US"/>
+          </a:p>
+        </p:txBody>
+      </p:sp>
+    </p:spTree>
+    <p:extLst>
+      <p:ext uri="{BB962C8B-B14F-4D97-AF65-F5344CB8AC3E}">
+        <p14:creationId xmlns:p14="http://schemas.microsoft.com/office/powerpoint/2010/main" val="1024086991"/>
+      </p:ext>
+    </p:extLst>
+  </p:cSld>
+  <p:clrMapOvr>
+    <a:masterClrMapping/>
+  </p:clrMapOvr>
+</p:notes>
+</file>
+
+<file path=ppt/notesSlides/notesSlide11.xml><?xml version="1.0" encoding="utf-8"?>
+<p:notes xmlns:a="http://schemas.openxmlformats.org/drawingml/2006/main" xmlns:r="http://schemas.openxmlformats.org/officeDocument/2006/relationships" xmlns:p="http://schemas.openxmlformats.org/presentationml/2006/main">
+  <p:cSld>
+    <p:spTree>
+      <p:nvGrpSpPr>
+        <p:cNvPr id="1" name=""/>
+        <p:cNvGrpSpPr/>
+        <p:nvPr/>
+      </p:nvGrpSpPr>
+      <p:grpSpPr>
+        <a:xfrm>
+          <a:off x="0" y="0"/>
+          <a:ext cx="0" cy="0"/>
+          <a:chOff x="0" y="0"/>
+          <a:chExt cx="0" cy="0"/>
+        </a:xfrm>
+      </p:grpSpPr>
+      <p:sp>
+        <p:nvSpPr>
+          <p:cNvPr id="2" name="Slide Image Placeholder 1"/>
+          <p:cNvSpPr>
+            <a:spLocks noGrp="1" noRot="1" noChangeAspect="1"/>
+          </p:cNvSpPr>
+          <p:nvPr>
+            <p:ph type="sldImg"/>
+          </p:nvPr>
+        </p:nvSpPr>
+        <p:spPr/>
+      </p:sp>
+      <p:sp>
+        <p:nvSpPr>
+          <p:cNvPr id="3" name="Notes Placeholder 2"/>
+          <p:cNvSpPr>
+            <a:spLocks noGrp="1"/>
+          </p:cNvSpPr>
+          <p:nvPr>
+            <p:ph type="body" idx="1"/>
+          </p:nvPr>
+        </p:nvSpPr>
+        <p:spPr/>
+        <p:txBody>
+          <a:bodyPr/>
+          <a:lstStyle/>
+          <a:p>
+            <a:r>
+              <a:rPr lang="en-US" dirty="0"/>
+              <a:t>When you're unsure where an edit belongs, find the row. The rule underneath: change a thing where it comes from. Workspace files through ws/&lt;name&gt;, shared context and machinery through main, code through its own repo, and personal settings nowhere at all.</a:t>
+            </a:r>
+            <a:endParaRPr lang="en-US" dirty="0"/>
+          </a:p>
+        </p:txBody>
+      </p:sp>
+      <p:sp>
+        <p:nvSpPr>
+          <p:cNvPr id="4" name="Slide Number Placeholder 3"/>
+          <p:cNvSpPr>
+            <a:spLocks noGrp="1"/>
+          </p:cNvSpPr>
+          <p:nvPr>
+            <p:ph type="sldNum" sz="quarter" idx="10"/>
+          </p:nvPr>
+        </p:nvSpPr>
+        <p:spPr/>
+        <p:txBody>
+          <a:bodyPr/>
+          <a:lstStyle/>
+          <a:p>
+            <a:fld id="{F7021451-1387-4CA6-816F-3879F97B5CBC}" type="slidenum">
+              <a:rPr lang="en-US"/>
+              <a:t>11</a:t>
+            </a:fld>
+            <a:endParaRPr lang="en-US"/>
+          </a:p>
+        </p:txBody>
+      </p:sp>
+    </p:spTree>
+    <p:extLst>
+      <p:ext uri="{BB962C8B-B14F-4D97-AF65-F5344CB8AC3E}">
+        <p14:creationId xmlns:p14="http://schemas.microsoft.com/office/powerpoint/2010/main" val="1024086991"/>
+      </p:ext>
+    </p:extLst>
+  </p:cSld>
+  <p:clrMapOvr>
+    <a:masterClrMapping/>
+  </p:clrMapOvr>
+</p:notes>
+</file>
+
+<file path=ppt/notesSlides/notesSlide12.xml><?xml version="1.0" encoding="utf-8"?>
+<p:notes xmlns:a="http://schemas.openxmlformats.org/drawingml/2006/main" xmlns:r="http://schemas.openxmlformats.org/officeDocument/2006/relationships" xmlns:p="http://schemas.openxmlformats.org/presentationml/2006/main">
+  <p:cSld>
+    <p:spTree>
+      <p:nvGrpSpPr>
+        <p:cNvPr id="1" name=""/>
+        <p:cNvGrpSpPr/>
+        <p:nvPr/>
+      </p:nvGrpSpPr>
+      <p:grpSpPr>
+        <a:xfrm>
+          <a:off x="0" y="0"/>
+          <a:ext cx="0" cy="0"/>
+          <a:chOff x="0" y="0"/>
+          <a:chExt cx="0" cy="0"/>
+        </a:xfrm>
+      </p:grpSpPr>
+      <p:sp>
+        <p:nvSpPr>
+          <p:cNvPr id="2" name="Slide Image Placeholder 1"/>
+          <p:cNvSpPr>
+            <a:spLocks noGrp="1" noRot="1" noChangeAspect="1"/>
+          </p:cNvSpPr>
+          <p:nvPr>
+            <p:ph type="sldImg"/>
+          </p:nvPr>
+        </p:nvSpPr>
+        <p:spPr/>
+      </p:sp>
+      <p:sp>
+        <p:nvSpPr>
+          <p:cNvPr id="3" name="Notes Placeholder 2"/>
+          <p:cNvSpPr>
+            <a:spLocks noGrp="1"/>
+          </p:cNvSpPr>
+          <p:nvPr>
+            <p:ph type="body" idx="1"/>
+          </p:nvPr>
+        </p:nvSpPr>
+        <p:spPr/>
+        <p:txBody>
+          <a:bodyPr/>
+          <a:lstStyle/>
+          <a:p>
+            <a:r>
+              <a:rPr lang="en-US" dirty="0"/>
+              <a:t>Three commands to a ready agent. Clone the workspace branch, run setup once, and start Claude Code at the root; the workspace's skills, glossary and repos are all there. Re-run setup after changing workspace.yml, and use switch.sh to move the same clone to another workspace or to main.</a:t>
+            </a:r>
+            <a:endParaRPr lang="en-US" dirty="0"/>
+          </a:p>
+        </p:txBody>
+      </p:sp>
+      <p:sp>
+        <p:nvSpPr>
+          <p:cNvPr id="4" name="Slide Number Placeholder 3"/>
+          <p:cNvSpPr>
+            <a:spLocks noGrp="1"/>
+          </p:cNvSpPr>
+          <p:nvPr>
+            <p:ph type="sldNum" sz="quarter" idx="10"/>
+          </p:nvPr>
+        </p:nvSpPr>
+        <p:spPr/>
+        <p:txBody>
+          <a:bodyPr/>
+          <a:lstStyle/>
+          <a:p>
+            <a:fld id="{F7021451-1387-4CA6-816F-3879F97B5CBC}" type="slidenum">
+              <a:rPr lang="en-US"/>
+              <a:t>12</a:t>
             </a:fld>
             <a:endParaRPr lang="en-US"/>
           </a:p>
@@ -598,7 +865,7 @@
           <a:p>
             <a:r>
               <a:rPr lang="en-US" dirty="0"/>
-              <a:t/>
+              <a:t>Everything is stored once, on Delphi's main branch, as a folder per workspace under software/, laid out like the org chart. For each folder, CI keeps a branch, ws/&lt;name&gt;, whose repo root is that folder, so you clone the branch and the workspace's files sit at their normal places. The workspace's name is just its folder path with workspaces/ removed.</a:t>
             </a:r>
             <a:endParaRPr lang="en-US" dirty="0"/>
           </a:p>
@@ -686,7 +953,7 @@
           <a:p>
             <a:r>
               <a:rPr lang="en-US" dirty="0"/>
-              <a:t/>
+              <a:t>workspace.yml is the heart of a workspace. Six keys. name and harness say which workspace it is and which agent it's for. The other four each pull something in: plugins are shared skills from the folders above, repos are the code you change, references-git are dependency sources the agent reads, and workspaces are other Delphi branches to read. This is argos-dev's real file, with URLs shortened.</a:t>
             </a:r>
             <a:endParaRPr lang="en-US" dirty="0"/>
           </a:p>
@@ -774,7 +1041,7 @@
           <a:p>
             <a:r>
               <a:rPr lang="en-US" dirty="0"/>
-              <a:t/>
+              <a:t>Two programs read workspace.yml. CI's ci/plugins.sh reads harness and plugins and writes .claude/settings.json, so Claude Code enables the right plugins. Your own .delphi/setup.sh reads repos, references-git and workspaces and checks each out. The checkout hook, park.sh, uses name to keep each workspace's folders apart when you switch. Everything setup makes is git-ignored, so code never shows up as a workspace change.</a:t>
             </a:r>
             <a:endParaRPr lang="en-US" dirty="0"/>
           </a:p>
@@ -862,7 +1129,7 @@
           <a:p>
             <a:r>
               <a:rPr lang="en-US" dirty="0"/>
-              <a:t/>
+              <a:t>This is the map to keep in your head. Gold files are the workspace's own: they live in its folder on main and you change them with a PR into ws/&lt;name&gt;. .delphi/ and the CI workflow are Delphi's machinery, shared by every workspace and changed only on main. settings.json is generated, never hand-edited. Plugins aren't in your clone at all: Claude Code installs them from folders higher up on main. Dashed folders are made on your machine by setup.sh, and dotted ones are yours alone.</a:t>
             </a:r>
             <a:endParaRPr lang="en-US" dirty="0"/>
           </a:p>
@@ -950,7 +1217,7 @@
           <a:p>
             <a:r>
               <a:rPr lang="en-US" dirty="0"/>
-              <a:t/>
+              <a:t>Folders above a workspace can share context in three ways, and they behave differently. defaults/ is copied once when the workspace is created, then it's the workspace's own. Plugin sets are one shared copy: CI enables each folder's default set in every workspace below it, and Claude Code keeps it current. And with main under workspaces:, a workspace can read its project folder at linked/main/ whenever it needs to.</a:t>
             </a:r>
             <a:endParaRPr lang="en-US" dirty="0"/>
           </a:p>
@@ -1038,7 +1305,7 @@
           <a:p>
             <a:r>
               <a:rPr lang="en-US" dirty="0"/>
-              <a:t/>
+              <a:t>A normal ticket. You clone the workspace and run setup once. /implement makes a worktree for the ticket's branch from origin/develop and works test-first; /run-local serves that worktree; /commit applies the message format; /open-pr runs the checks and opens a draft PR into Argos develop. The skills that guide every step come from the workspace, but the code goes through Argos's own PRs. worktrees/ is git-ignored, so Delphi never sees it.</a:t>
             </a:r>
             <a:endParaRPr lang="en-US" dirty="0"/>
           </a:p>
@@ -1126,7 +1393,7 @@
           <a:p>
             <a:r>
               <a:rPr lang="en-US" dirty="0"/>
-              <a:t/>
+              <a:t>Say /implement missed a step. Park the thought with /journal, then fix the skill on a branch of ws/&lt;name&gt; and PR it into ws/&lt;name&gt;, reviewed like code. After it merges, CI proposes it to main as a PR from propose/&lt;name&gt;; check.sh runs on it. Merge that PR with a merge commit or squash, never a rebase. CI then refreshes every workspace branch, and teammates pick it up with git merge origin/ws/&lt;name&gt;.</a:t>
             </a:r>
             <a:endParaRPr lang="en-US" dirty="0"/>
           </a:p>
@@ -1214,7 +1481,7 @@
           <a:p>
             <a:r>
               <a:rPr lang="en-US" dirty="0"/>
-              <a:t/>
+              <a:t>Both directions are subtree merges done by ci/sync.sh on every push to main or any ws/ branch. Refresh merges main into ws/&lt;name&gt; with the folder mapped to the root; propose does the reverse into propose/&lt;name&gt; and opens the PR. Because they're merges, histories stay joined and edits on both sides meet in a normal three-way merge. Sync also puts main's .delphi/ on every branch and regenerates settings.json, undoing hand edits to either.</a:t>
             </a:r>
             <a:endParaRPr lang="en-US" dirty="0"/>
           </a:p>
@@ -1587,26 +1854,106 @@
           <a:chExt cx="0" cy="0"/>
         </a:xfrm>
       </p:grpSpPr>
-      <p:sp>
-        <p:nvSpPr>
-          <p:cNvPr id="2" name="Shape 0"/>
+      <p:pic>
+        <p:nvPicPr>
+          <p:cNvPr id="2" name="Image 0" descr="/private/tmp/claude-501/-Users-wyattbracy-Desktop-ner-app-software-Delphi/28e5bd69-bc06-4d46-875e-7c63334f5a2a/scratchpad/build/out/pptx/01.png">    </p:cNvPr>
+          <p:cNvPicPr>
+            <a:picLocks noChangeAspect="1"/>
+          </p:cNvPicPr>
+          <p:nvPr/>
+        </p:nvPicPr>
+        <p:blipFill>
+          <a:blip r:embed="rId1"/>
+          <a:stretch>
+            <a:fillRect/>
+          </a:stretch>
+        </p:blipFill>
+        <p:spPr>
+          <a:xfrm>
+            <a:off x="0" y="0"/>
+            <a:ext cx="9144000" cy="5143500"/>
+          </a:xfrm>
+          <a:prstGeom prst="rect">
+            <a:avLst/>
+          </a:prstGeom>
+        </p:spPr>
+      </p:pic>
+    </p:spTree>
+  </p:cSld>
+  <p:clrMapOvr>
+    <a:masterClrMapping/>
+  </p:clrMapOvr>
+</p:sld>
+</file>
+
+<file path=ppt/slides/slide10.xml><?xml version="1.0" encoding="utf-8"?>
+<p:sld xmlns:a="http://schemas.openxmlformats.org/drawingml/2006/main" xmlns:r="http://schemas.openxmlformats.org/officeDocument/2006/relationships" xmlns:p="http://schemas.openxmlformats.org/presentationml/2006/main">
+  <p:cSld name="Slide 10">
+    <p:bg>
+      <p:bgPr>
+        <a:solidFill>
+          <a:srgbClr val="F7F4EE"/>
+        </a:solidFill>
+      </p:bgPr>
+    </p:bg>
+    <p:spTree>
+      <p:nvGrpSpPr>
+        <p:cNvPr id="1" name=""/>
+        <p:cNvGrpSpPr/>
+        <p:nvPr/>
+      </p:nvGrpSpPr>
+      <p:grpSpPr>
+        <a:xfrm>
+          <a:off x="0" y="0"/>
+          <a:ext cx="0" cy="0"/>
+          <a:chOff x="0" y="0"/>
+          <a:chExt cx="0" cy="0"/>
+        </a:xfrm>
+      </p:grpSpPr>
+      <p:pic>
+        <p:nvPicPr>
+          <p:cNvPr id="2" name="Image 0" descr="/private/tmp/claude-501/-Users-wyattbracy-Desktop-ner-app-software-Delphi/28e5bd69-bc06-4d46-875e-7c63334f5a2a/scratchpad/build/out/pptx/10.png">    </p:cNvPr>
+          <p:cNvPicPr>
+            <a:picLocks noChangeAspect="1"/>
+          </p:cNvPicPr>
+          <p:nvPr/>
+        </p:nvPicPr>
+        <p:blipFill>
+          <a:blip r:embed="rId1"/>
+          <a:stretch>
+            <a:fillRect/>
+          </a:stretch>
+        </p:blipFill>
+        <p:spPr>
+          <a:xfrm>
+            <a:off x="0" y="0"/>
+            <a:ext cx="9144000" cy="5143500"/>
+          </a:xfrm>
+          <a:prstGeom prst="rect">
+            <a:avLst/>
+          </a:prstGeom>
+        </p:spPr>
+      </p:pic>
+      <p:sp>
+        <p:nvSpPr>
+          <p:cNvPr id="3" name="Shape 0"/>
           <p:cNvSpPr/>
           <p:nvPr/>
         </p:nvSpPr>
         <p:spPr>
           <a:xfrm>
-            <a:off x="548640" y="1691640"/>
-            <a:ext cx="146304" cy="146304"/>
+            <a:off x="457200" y="331470"/>
+            <a:ext cx="85725" cy="85725"/>
           </a:xfrm>
           <a:prstGeom prst="rect">
             <a:avLst/>
           </a:prstGeom>
           <a:solidFill>
-            <a:srgbClr val="C9932E"/>
+            <a:srgbClr val="B9821F"/>
           </a:solidFill>
           <a:ln w="12700">
             <a:solidFill>
-              <a:srgbClr val="C9932E"/>
+              <a:srgbClr val="B9821F"/>
             </a:solidFill>
             <a:prstDash val="solid"/>
           </a:ln>
@@ -1614,14 +1961,14 @@
       </p:sp>
       <p:sp>
         <p:nvSpPr>
-          <p:cNvPr id="3" name="Text 1"/>
+          <p:cNvPr id="4" name="Text 1"/>
           <p:cNvSpPr/>
           <p:nvPr/>
         </p:nvSpPr>
         <p:spPr>
           <a:xfrm>
-            <a:off x="822960" y="1618488"/>
-            <a:ext cx="5486400" cy="292608"/>
+            <a:off x="617220" y="297180"/>
+            <a:ext cx="6400800" cy="148590"/>
           </a:xfrm>
           <a:prstGeom prst="rect">
             <a:avLst/>
@@ -1637,30 +1984,30 @@
               <a:buNone/>
             </a:pPr>
             <a:r>
-              <a:rPr lang="en-US" sz="1300" b="1" spc="400" kern="0" dirty="0">
+              <a:rPr lang="en-US" sz="810" b="1" spc="160" kern="0" dirty="0">
                 <a:solidFill>
-                  <a:srgbClr val="C9932E"/>
+                  <a:srgbClr val="B9821F"/>
                 </a:solidFill>
-                <a:latin typeface="Calibri" pitchFamily="34" charset="0"/>
-                <a:ea typeface="Calibri" pitchFamily="34" charset="-122"/>
-                <a:cs typeface="Calibri" pitchFamily="34" charset="-120"/>
+                <a:latin typeface="Helvetica Neue" pitchFamily="34" charset="0"/>
+                <a:ea typeface="Helvetica Neue" pitchFamily="34" charset="-122"/>
+                <a:cs typeface="Helvetica Neue" pitchFamily="34" charset="-120"/>
               </a:rPr>
-              <a:t>NER SOFTWARE  ·  AI TOOLING</a:t>
+              <a:t>WORKSPACE.YML  ·  IN PRACTICE</a:t>
             </a:r>
-            <a:endParaRPr lang="en-US" sz="1300" dirty="0"/>
-          </a:p>
-        </p:txBody>
-      </p:sp>
-      <p:sp>
-        <p:nvSpPr>
-          <p:cNvPr id="4" name="Text 2"/>
+            <a:endParaRPr lang="en-US" sz="810" dirty="0"/>
+          </a:p>
+        </p:txBody>
+      </p:sp>
+      <p:sp>
+        <p:nvSpPr>
+          <p:cNvPr id="5" name="Text 2"/>
           <p:cNvSpPr/>
           <p:nvPr/>
         </p:nvSpPr>
         <p:spPr>
           <a:xfrm>
-            <a:off x="548640" y="2057400"/>
-            <a:ext cx="7315200" cy="1005840"/>
+            <a:off x="457200" y="502920"/>
+            <a:ext cx="8229600" cy="365760"/>
           </a:xfrm>
           <a:prstGeom prst="rect">
             <a:avLst/>
@@ -1669,37 +2016,120 @@
           <a:ln/>
         </p:spPr>
         <p:txBody>
-          <a:bodyPr wrap="square" lIns="0" tIns="0" rIns="0" bIns="0" rtlCol="0" anchor="ctr"/>
+          <a:bodyPr wrap="square" lIns="0" tIns="0" rIns="0" bIns="0" rtlCol="0" anchor="ctr">
+            <a:normAutofit/>
+          </a:bodyPr>
           <a:lstStyle/>
           <a:p>
             <a:pPr indent="0" marL="0">
               <a:buNone/>
             </a:pPr>
             <a:r>
-              <a:rPr lang="en-US" sz="6000" b="1" dirty="0">
+              <a:rPr lang="en-US" sz="2250" b="1" dirty="0">
                 <a:solidFill>
-                  <a:srgbClr val="FFFFFF"/>
+                  <a:srgbClr val="1C2230"/>
                 </a:solidFill>
                 <a:latin typeface="Georgia" pitchFamily="34" charset="0"/>
                 <a:ea typeface="Georgia" pitchFamily="34" charset="-122"/>
                 <a:cs typeface="Georgia" pitchFamily="34" charset="-120"/>
               </a:rPr>
-              <a:t>Delphi</a:t>
+              <a:t>Need more in your workspace? Edit workspace.yml</a:t>
             </a:r>
-            <a:endParaRPr lang="en-US" sz="6000" dirty="0"/>
-          </a:p>
-        </p:txBody>
-      </p:sp>
-      <p:sp>
-        <p:nvSpPr>
-          <p:cNvPr id="5" name="Text 3"/>
+            <a:endParaRPr lang="en-US" sz="2250" dirty="0"/>
+          </a:p>
+        </p:txBody>
+      </p:sp>
+    </p:spTree>
+  </p:cSld>
+  <p:clrMapOvr>
+    <a:masterClrMapping/>
+  </p:clrMapOvr>
+</p:sld>
+</file>
+
+<file path=ppt/slides/slide11.xml><?xml version="1.0" encoding="utf-8"?>
+<p:sld xmlns:a="http://schemas.openxmlformats.org/drawingml/2006/main" xmlns:r="http://schemas.openxmlformats.org/officeDocument/2006/relationships" xmlns:p="http://schemas.openxmlformats.org/presentationml/2006/main">
+  <p:cSld name="Slide 11">
+    <p:bg>
+      <p:bgPr>
+        <a:solidFill>
+          <a:srgbClr val="F7F4EE"/>
+        </a:solidFill>
+      </p:bgPr>
+    </p:bg>
+    <p:spTree>
+      <p:nvGrpSpPr>
+        <p:cNvPr id="1" name=""/>
+        <p:cNvGrpSpPr/>
+        <p:nvPr/>
+      </p:nvGrpSpPr>
+      <p:grpSpPr>
+        <a:xfrm>
+          <a:off x="0" y="0"/>
+          <a:ext cx="0" cy="0"/>
+          <a:chOff x="0" y="0"/>
+          <a:chExt cx="0" cy="0"/>
+        </a:xfrm>
+      </p:grpSpPr>
+      <p:pic>
+        <p:nvPicPr>
+          <p:cNvPr id="2" name="Image 0" descr="/private/tmp/claude-501/-Users-wyattbracy-Desktop-ner-app-software-Delphi/28e5bd69-bc06-4d46-875e-7c63334f5a2a/scratchpad/build/out/pptx/11.png">    </p:cNvPr>
+          <p:cNvPicPr>
+            <a:picLocks noChangeAspect="1"/>
+          </p:cNvPicPr>
+          <p:nvPr/>
+        </p:nvPicPr>
+        <p:blipFill>
+          <a:blip r:embed="rId1"/>
+          <a:stretch>
+            <a:fillRect/>
+          </a:stretch>
+        </p:blipFill>
+        <p:spPr>
+          <a:xfrm>
+            <a:off x="0" y="0"/>
+            <a:ext cx="9144000" cy="5143500"/>
+          </a:xfrm>
+          <a:prstGeom prst="rect">
+            <a:avLst/>
+          </a:prstGeom>
+        </p:spPr>
+      </p:pic>
+      <p:sp>
+        <p:nvSpPr>
+          <p:cNvPr id="3" name="Shape 0"/>
           <p:cNvSpPr/>
           <p:nvPr/>
         </p:nvSpPr>
         <p:spPr>
           <a:xfrm>
-            <a:off x="548640" y="3154680"/>
-            <a:ext cx="8138160" cy="731520"/>
+            <a:off x="457200" y="331470"/>
+            <a:ext cx="85725" cy="85725"/>
+          </a:xfrm>
+          <a:prstGeom prst="rect">
+            <a:avLst/>
+          </a:prstGeom>
+          <a:solidFill>
+            <a:srgbClr val="B9821F"/>
+          </a:solidFill>
+          <a:ln w="12700">
+            <a:solidFill>
+              <a:srgbClr val="B9821F"/>
+            </a:solidFill>
+            <a:prstDash val="solid"/>
+          </a:ln>
+        </p:spPr>
+      </p:sp>
+      <p:sp>
+        <p:nvSpPr>
+          <p:cNvPr id="4" name="Text 1"/>
+          <p:cNvSpPr/>
+          <p:nvPr/>
+        </p:nvSpPr>
+        <p:spPr>
+          <a:xfrm>
+            <a:off x="617220" y="297180"/>
+            <a:ext cx="6400800" cy="148590"/>
           </a:xfrm>
           <a:prstGeom prst="rect">
             <a:avLst/>
@@ -1715,20 +2145,117 @@
               <a:buNone/>
             </a:pPr>
             <a:r>
-              <a:rPr lang="en-US" sz="1900" dirty="0">
+              <a:rPr lang="en-US" sz="810" b="1" spc="160" kern="0" dirty="0">
                 <a:solidFill>
-                  <a:srgbClr val="B9BDC6"/>
+                  <a:srgbClr val="B9821F"/>
                 </a:solidFill>
-                <a:latin typeface="Calibri" pitchFamily="34" charset="0"/>
-                <a:ea typeface="Calibri" pitchFamily="34" charset="-122"/>
-                <a:cs typeface="Calibri" pitchFamily="34" charset="-120"/>
+                <a:latin typeface="Helvetica Neue" pitchFamily="34" charset="0"/>
+                <a:ea typeface="Helvetica Neue" pitchFamily="34" charset="-122"/>
+                <a:cs typeface="Helvetica Neue" pitchFamily="34" charset="-120"/>
               </a:rPr>
-              <a:t>One home for our AI context: organized by org chart, checked out like a repo.</a:t>
+              <a:t>CHEAT SHEET</a:t>
             </a:r>
-            <a:endParaRPr lang="en-US" sz="1900" dirty="0"/>
-          </a:p>
-        </p:txBody>
-      </p:sp>
+            <a:endParaRPr lang="en-US" sz="810" dirty="0"/>
+          </a:p>
+        </p:txBody>
+      </p:sp>
+      <p:sp>
+        <p:nvSpPr>
+          <p:cNvPr id="5" name="Text 2"/>
+          <p:cNvSpPr/>
+          <p:nvPr/>
+        </p:nvSpPr>
+        <p:spPr>
+          <a:xfrm>
+            <a:off x="457200" y="502920"/>
+            <a:ext cx="8229600" cy="365760"/>
+          </a:xfrm>
+          <a:prstGeom prst="rect">
+            <a:avLst/>
+          </a:prstGeom>
+          <a:noFill/>
+          <a:ln/>
+        </p:spPr>
+        <p:txBody>
+          <a:bodyPr wrap="square" lIns="0" tIns="0" rIns="0" bIns="0" rtlCol="0" anchor="ctr">
+            <a:normAutofit/>
+          </a:bodyPr>
+          <a:lstStyle/>
+          <a:p>
+            <a:pPr indent="0" marL="0">
+              <a:buNone/>
+            </a:pPr>
+            <a:r>
+              <a:rPr lang="en-US" sz="2250" b="1" dirty="0">
+                <a:solidFill>
+                  <a:srgbClr val="1C2230"/>
+                </a:solidFill>
+                <a:latin typeface="Georgia" pitchFamily="34" charset="0"/>
+                <a:ea typeface="Georgia" pitchFamily="34" charset="-122"/>
+                <a:cs typeface="Georgia" pitchFamily="34" charset="-120"/>
+              </a:rPr>
+              <a:t>Where do I change…?</a:t>
+            </a:r>
+            <a:endParaRPr lang="en-US" sz="2250" dirty="0"/>
+          </a:p>
+        </p:txBody>
+      </p:sp>
+    </p:spTree>
+  </p:cSld>
+  <p:clrMapOvr>
+    <a:masterClrMapping/>
+  </p:clrMapOvr>
+</p:sld>
+</file>
+
+<file path=ppt/slides/slide12.xml><?xml version="1.0" encoding="utf-8"?>
+<p:sld xmlns:a="http://schemas.openxmlformats.org/drawingml/2006/main" xmlns:r="http://schemas.openxmlformats.org/officeDocument/2006/relationships" xmlns:p="http://schemas.openxmlformats.org/presentationml/2006/main">
+  <p:cSld name="Slide 12">
+    <p:bg>
+      <p:bgPr>
+        <a:solidFill>
+          <a:srgbClr val="1C2230"/>
+        </a:solidFill>
+      </p:bgPr>
+    </p:bg>
+    <p:spTree>
+      <p:nvGrpSpPr>
+        <p:cNvPr id="1" name=""/>
+        <p:cNvGrpSpPr/>
+        <p:nvPr/>
+      </p:nvGrpSpPr>
+      <p:grpSpPr>
+        <a:xfrm>
+          <a:off x="0" y="0"/>
+          <a:ext cx="0" cy="0"/>
+          <a:chOff x="0" y="0"/>
+          <a:chExt cx="0" cy="0"/>
+        </a:xfrm>
+      </p:grpSpPr>
+      <p:pic>
+        <p:nvPicPr>
+          <p:cNvPr id="2" name="Image 0" descr="/private/tmp/claude-501/-Users-wyattbracy-Desktop-ner-app-software-Delphi/28e5bd69-bc06-4d46-875e-7c63334f5a2a/scratchpad/build/out/pptx/12.png">    </p:cNvPr>
+          <p:cNvPicPr>
+            <a:picLocks noChangeAspect="1"/>
+          </p:cNvPicPr>
+          <p:nvPr/>
+        </p:nvPicPr>
+        <p:blipFill>
+          <a:blip r:embed="rId1"/>
+          <a:stretch>
+            <a:fillRect/>
+          </a:stretch>
+        </p:blipFill>
+        <p:spPr>
+          <a:xfrm>
+            <a:off x="0" y="0"/>
+            <a:ext cx="9144000" cy="5143500"/>
+          </a:xfrm>
+          <a:prstGeom prst="rect">
+            <a:avLst/>
+          </a:prstGeom>
+        </p:spPr>
+      </p:pic>
     </p:spTree>
   </p:cSld>
   <p:clrMapOvr>
@@ -1761,26 +2288,50 @@
           <a:chExt cx="0" cy="0"/>
         </a:xfrm>
       </p:grpSpPr>
-      <p:sp>
-        <p:nvSpPr>
-          <p:cNvPr id="2" name="Shape 0"/>
+      <p:pic>
+        <p:nvPicPr>
+          <p:cNvPr id="2" name="Image 0" descr="/private/tmp/claude-501/-Users-wyattbracy-Desktop-ner-app-software-Delphi/28e5bd69-bc06-4d46-875e-7c63334f5a2a/scratchpad/build/out/pptx/02.png">    </p:cNvPr>
+          <p:cNvPicPr>
+            <a:picLocks noChangeAspect="1"/>
+          </p:cNvPicPr>
+          <p:nvPr/>
+        </p:nvPicPr>
+        <p:blipFill>
+          <a:blip r:embed="rId1"/>
+          <a:stretch>
+            <a:fillRect/>
+          </a:stretch>
+        </p:blipFill>
+        <p:spPr>
+          <a:xfrm>
+            <a:off x="0" y="0"/>
+            <a:ext cx="9144000" cy="5143500"/>
+          </a:xfrm>
+          <a:prstGeom prst="rect">
+            <a:avLst/>
+          </a:prstGeom>
+        </p:spPr>
+      </p:pic>
+      <p:sp>
+        <p:nvSpPr>
+          <p:cNvPr id="3" name="Shape 0"/>
           <p:cNvSpPr/>
           <p:nvPr/>
         </p:nvSpPr>
         <p:spPr>
           <a:xfrm>
-            <a:off x="457200" y="329184"/>
-            <a:ext cx="109728" cy="109728"/>
+            <a:off x="457200" y="331470"/>
+            <a:ext cx="85725" cy="85725"/>
           </a:xfrm>
           <a:prstGeom prst="rect">
             <a:avLst/>
           </a:prstGeom>
           <a:solidFill>
-            <a:srgbClr val="C9932E"/>
+            <a:srgbClr val="B9821F"/>
           </a:solidFill>
           <a:ln w="12700">
             <a:solidFill>
-              <a:srgbClr val="C9932E"/>
+              <a:srgbClr val="B9821F"/>
             </a:solidFill>
             <a:prstDash val="solid"/>
           </a:ln>
@@ -1788,14 +2339,14 @@
       </p:sp>
       <p:sp>
         <p:nvSpPr>
-          <p:cNvPr id="3" name="Text 1"/>
+          <p:cNvPr id="4" name="Text 1"/>
           <p:cNvSpPr/>
           <p:nvPr/>
         </p:nvSpPr>
         <p:spPr>
           <a:xfrm>
-            <a:off x="640080" y="256032"/>
-            <a:ext cx="5486400" cy="256032"/>
+            <a:off x="617220" y="297180"/>
+            <a:ext cx="6400800" cy="148590"/>
           </a:xfrm>
           <a:prstGeom prst="rect">
             <a:avLst/>
@@ -1811,30 +2362,30 @@
               <a:buNone/>
             </a:pPr>
             <a:r>
-              <a:rPr lang="en-US" sz="1100" b="1" spc="300" kern="0" dirty="0">
+              <a:rPr lang="en-US" sz="810" b="1" spc="160" kern="0" dirty="0">
                 <a:solidFill>
-                  <a:srgbClr val="C9932E"/>
+                  <a:srgbClr val="B9821F"/>
                 </a:solidFill>
-                <a:latin typeface="Calibri" pitchFamily="34" charset="0"/>
-                <a:ea typeface="Calibri" pitchFamily="34" charset="-122"/>
-                <a:cs typeface="Calibri" pitchFamily="34" charset="-120"/>
+                <a:latin typeface="Helvetica Neue" pitchFamily="34" charset="0"/>
+                <a:ea typeface="Helvetica Neue" pitchFamily="34" charset="-122"/>
+                <a:cs typeface="Helvetica Neue" pitchFamily="34" charset="-120"/>
               </a:rPr>
-              <a:t>OVERVIEW</a:t>
+              <a:t>THE MODEL</a:t>
             </a:r>
-            <a:endParaRPr lang="en-US" sz="1100" dirty="0"/>
-          </a:p>
-        </p:txBody>
-      </p:sp>
-      <p:sp>
-        <p:nvSpPr>
-          <p:cNvPr id="4" name="Text 2"/>
+            <a:endParaRPr lang="en-US" sz="810" dirty="0"/>
+          </a:p>
+        </p:txBody>
+      </p:sp>
+      <p:sp>
+        <p:nvSpPr>
+          <p:cNvPr id="5" name="Text 2"/>
           <p:cNvSpPr/>
           <p:nvPr/>
         </p:nvSpPr>
         <p:spPr>
           <a:xfrm>
-            <a:off x="457200" y="512064"/>
-            <a:ext cx="8229600" cy="502920"/>
+            <a:off x="457200" y="502920"/>
+            <a:ext cx="8229600" cy="365760"/>
           </a:xfrm>
           <a:prstGeom prst="rect">
             <a:avLst/>
@@ -1843,14 +2394,16 @@
           <a:ln/>
         </p:spPr>
         <p:txBody>
-          <a:bodyPr wrap="square" lIns="0" tIns="0" rIns="0" bIns="0" rtlCol="0" anchor="ctr"/>
+          <a:bodyPr wrap="square" lIns="0" tIns="0" rIns="0" bIns="0" rtlCol="0" anchor="ctr">
+            <a:normAutofit/>
+          </a:bodyPr>
           <a:lstStyle/>
           <a:p>
             <a:pPr indent="0" marL="0">
               <a:buNone/>
             </a:pPr>
             <a:r>
-              <a:rPr lang="en-US" sz="2800" b="1" dirty="0">
+              <a:rPr lang="en-US" sz="2250" b="1" dirty="0">
                 <a:solidFill>
                   <a:srgbClr val="1C2230"/>
                 </a:solidFill>
@@ -1858,36 +2411,12 @@
                 <a:ea typeface="Georgia" pitchFamily="34" charset="-122"/>
                 <a:cs typeface="Georgia" pitchFamily="34" charset="-120"/>
               </a:rPr>
-              <a:t>Everything lives in one repo, by org chart</a:t>
+              <a:t>A workspace is a folder on main, and a branch you clone</a:t>
             </a:r>
-            <a:endParaRPr lang="en-US" sz="2800" dirty="0"/>
-          </a:p>
-        </p:txBody>
-      </p:sp>
-      <p:pic>
-        <p:nvPicPr>
-          <p:cNvPr id="5" name="Image 0" descr="/private/tmp/claude-501/-Users-wyattbracy-Desktop-ner-app-software-Delphi/3a53aefc-b6fc-4748-b97c-ca799d718193/scratchpad/build/img/structure.png">    </p:cNvPr>
-          <p:cNvPicPr>
-            <a:picLocks noChangeAspect="1"/>
-          </p:cNvPicPr>
-          <p:nvPr/>
-        </p:nvPicPr>
-        <p:blipFill>
-          <a:blip r:embed="rId1"/>
-          <a:stretch>
-            <a:fillRect/>
-          </a:stretch>
-        </p:blipFill>
-        <p:spPr>
-          <a:xfrm>
-            <a:off x="457200" y="1188720"/>
-            <a:ext cx="8229600" cy="3657600"/>
-          </a:xfrm>
-          <a:prstGeom prst="rect">
-            <a:avLst/>
-          </a:prstGeom>
-        </p:spPr>
-      </p:pic>
+            <a:endParaRPr lang="en-US" sz="2250" dirty="0"/>
+          </a:p>
+        </p:txBody>
+      </p:sp>
     </p:spTree>
   </p:cSld>
   <p:clrMapOvr>
@@ -1920,26 +2449,50 @@
           <a:chExt cx="0" cy="0"/>
         </a:xfrm>
       </p:grpSpPr>
-      <p:sp>
-        <p:nvSpPr>
-          <p:cNvPr id="2" name="Shape 0"/>
+      <p:pic>
+        <p:nvPicPr>
+          <p:cNvPr id="2" name="Image 0" descr="/private/tmp/claude-501/-Users-wyattbracy-Desktop-ner-app-software-Delphi/28e5bd69-bc06-4d46-875e-7c63334f5a2a/scratchpad/build/out/pptx/03.png">    </p:cNvPr>
+          <p:cNvPicPr>
+            <a:picLocks noChangeAspect="1"/>
+          </p:cNvPicPr>
+          <p:nvPr/>
+        </p:nvPicPr>
+        <p:blipFill>
+          <a:blip r:embed="rId1"/>
+          <a:stretch>
+            <a:fillRect/>
+          </a:stretch>
+        </p:blipFill>
+        <p:spPr>
+          <a:xfrm>
+            <a:off x="0" y="0"/>
+            <a:ext cx="9144000" cy="5143500"/>
+          </a:xfrm>
+          <a:prstGeom prst="rect">
+            <a:avLst/>
+          </a:prstGeom>
+        </p:spPr>
+      </p:pic>
+      <p:sp>
+        <p:nvSpPr>
+          <p:cNvPr id="3" name="Shape 0"/>
           <p:cNvSpPr/>
           <p:nvPr/>
         </p:nvSpPr>
         <p:spPr>
           <a:xfrm>
-            <a:off x="457200" y="329184"/>
-            <a:ext cx="109728" cy="109728"/>
+            <a:off x="457200" y="331470"/>
+            <a:ext cx="85725" cy="85725"/>
           </a:xfrm>
           <a:prstGeom prst="rect">
             <a:avLst/>
           </a:prstGeom>
           <a:solidFill>
-            <a:srgbClr val="C9932E"/>
+            <a:srgbClr val="B9821F"/>
           </a:solidFill>
           <a:ln w="12700">
             <a:solidFill>
-              <a:srgbClr val="C9932E"/>
+              <a:srgbClr val="B9821F"/>
             </a:solidFill>
             <a:prstDash val="solid"/>
           </a:ln>
@@ -1947,14 +2500,14 @@
       </p:sp>
       <p:sp>
         <p:nvSpPr>
-          <p:cNvPr id="3" name="Text 1"/>
+          <p:cNvPr id="4" name="Text 1"/>
           <p:cNvSpPr/>
           <p:nvPr/>
         </p:nvSpPr>
         <p:spPr>
           <a:xfrm>
-            <a:off x="640080" y="256032"/>
-            <a:ext cx="5486400" cy="256032"/>
+            <a:off x="617220" y="297180"/>
+            <a:ext cx="6400800" cy="148590"/>
           </a:xfrm>
           <a:prstGeom prst="rect">
             <a:avLst/>
@@ -1970,30 +2523,30 @@
               <a:buNone/>
             </a:pPr>
             <a:r>
-              <a:rPr lang="en-US" sz="1100" b="1" spc="300" kern="0" dirty="0">
+              <a:rPr lang="en-US" sz="810" b="1" spc="160" kern="0" dirty="0">
                 <a:solidFill>
-                  <a:srgbClr val="C9932E"/>
+                  <a:srgbClr val="B9821F"/>
                 </a:solidFill>
-                <a:latin typeface="Calibri" pitchFamily="34" charset="0"/>
-                <a:ea typeface="Calibri" pitchFamily="34" charset="-122"/>
-                <a:cs typeface="Calibri" pitchFamily="34" charset="-120"/>
+                <a:latin typeface="Helvetica Neue" pitchFamily="34" charset="0"/>
+                <a:ea typeface="Helvetica Neue" pitchFamily="34" charset="-122"/>
+                <a:cs typeface="Helvetica Neue" pitchFamily="34" charset="-120"/>
               </a:rPr>
-              <a:t>OVERVIEW</a:t>
+              <a:t>WORKSPACE.YML</a:t>
             </a:r>
-            <a:endParaRPr lang="en-US" sz="1100" dirty="0"/>
-          </a:p>
-        </p:txBody>
-      </p:sp>
-      <p:sp>
-        <p:nvSpPr>
-          <p:cNvPr id="4" name="Text 2"/>
+            <a:endParaRPr lang="en-US" sz="810" dirty="0"/>
+          </a:p>
+        </p:txBody>
+      </p:sp>
+      <p:sp>
+        <p:nvSpPr>
+          <p:cNvPr id="5" name="Text 2"/>
           <p:cNvSpPr/>
           <p:nvPr/>
         </p:nvSpPr>
         <p:spPr>
           <a:xfrm>
-            <a:off x="457200" y="512064"/>
-            <a:ext cx="8229600" cy="502920"/>
+            <a:off x="457200" y="502920"/>
+            <a:ext cx="8229600" cy="365760"/>
           </a:xfrm>
           <a:prstGeom prst="rect">
             <a:avLst/>
@@ -2002,14 +2555,16 @@
           <a:ln/>
         </p:spPr>
         <p:txBody>
-          <a:bodyPr wrap="square" lIns="0" tIns="0" rIns="0" bIns="0" rtlCol="0" anchor="ctr"/>
+          <a:bodyPr wrap="square" lIns="0" tIns="0" rIns="0" bIns="0" rtlCol="0" anchor="ctr">
+            <a:normAutofit/>
+          </a:bodyPr>
           <a:lstStyle/>
           <a:p>
             <a:pPr indent="0" marL="0">
               <a:buNone/>
             </a:pPr>
             <a:r>
-              <a:rPr lang="en-US" sz="2800" b="1" dirty="0">
+              <a:rPr lang="en-US" sz="2250" b="1" dirty="0">
                 <a:solidFill>
                   <a:srgbClr val="1C2230"/>
                 </a:solidFill>
@@ -2017,501 +2572,12 @@
                 <a:ea typeface="Georgia" pitchFamily="34" charset="-122"/>
                 <a:cs typeface="Georgia" pitchFamily="34" charset="-120"/>
               </a:rPr>
-              <a:t>Check out a workspace, get a ready agent</a:t>
+              <a:t>One small file says what a workspace pulls in</a:t>
             </a:r>
-            <a:endParaRPr lang="en-US" sz="2800" dirty="0"/>
-          </a:p>
-        </p:txBody>
-      </p:sp>
-      <p:sp>
-        <p:nvSpPr>
-          <p:cNvPr id="5" name="Shape 3"/>
-          <p:cNvSpPr/>
-          <p:nvPr/>
-        </p:nvSpPr>
-        <p:spPr>
-          <a:xfrm>
-            <a:off x="457200" y="1325880"/>
-            <a:ext cx="420624" cy="420624"/>
-          </a:xfrm>
-          <a:prstGeom prst="ellipse">
-            <a:avLst/>
-          </a:prstGeom>
-          <a:solidFill>
-            <a:srgbClr val="C9932E"/>
-          </a:solidFill>
-          <a:ln w="12700">
-            <a:solidFill>
-              <a:srgbClr val="C9932E"/>
-            </a:solidFill>
-            <a:prstDash val="solid"/>
-          </a:ln>
-        </p:spPr>
-      </p:sp>
-      <p:sp>
-        <p:nvSpPr>
-          <p:cNvPr id="6" name="Text 4"/>
-          <p:cNvSpPr/>
-          <p:nvPr/>
-        </p:nvSpPr>
-        <p:spPr>
-          <a:xfrm>
-            <a:off x="457200" y="1325880"/>
-            <a:ext cx="420624" cy="420624"/>
-          </a:xfrm>
-          <a:prstGeom prst="rect">
-            <a:avLst/>
-          </a:prstGeom>
-          <a:noFill/>
-          <a:ln/>
-        </p:spPr>
-        <p:txBody>
-          <a:bodyPr wrap="square" lIns="0" tIns="0" rIns="0" bIns="0" rtlCol="0" anchor="ctr"/>
-          <a:lstStyle/>
-          <a:p>
-            <a:pPr algn="ctr" indent="0" marL="0">
-              <a:buNone/>
-            </a:pPr>
-            <a:r>
-              <a:rPr lang="en-US" sz="1800" b="1" dirty="0">
-                <a:solidFill>
-                  <a:srgbClr val="FFFFFF"/>
-                </a:solidFill>
-                <a:latin typeface="Georgia" pitchFamily="34" charset="0"/>
-                <a:ea typeface="Georgia" pitchFamily="34" charset="-122"/>
-                <a:cs typeface="Georgia" pitchFamily="34" charset="-120"/>
-              </a:rPr>
-              <a:t>1</a:t>
-            </a:r>
-            <a:endParaRPr lang="en-US" sz="1800" dirty="0"/>
-          </a:p>
-        </p:txBody>
-      </p:sp>
-      <p:sp>
-        <p:nvSpPr>
-          <p:cNvPr id="7" name="Text 5"/>
-          <p:cNvSpPr/>
-          <p:nvPr/>
-        </p:nvSpPr>
-        <p:spPr>
-          <a:xfrm>
-            <a:off x="1051560" y="1289304"/>
-            <a:ext cx="3383280" cy="292608"/>
-          </a:xfrm>
-          <a:prstGeom prst="rect">
-            <a:avLst/>
-          </a:prstGeom>
-          <a:noFill/>
-          <a:ln/>
-        </p:spPr>
-        <p:txBody>
-          <a:bodyPr wrap="square" lIns="0" tIns="0" rIns="0" bIns="0" rtlCol="0" anchor="ctr"/>
-          <a:lstStyle/>
-          <a:p>
-            <a:pPr indent="0" marL="0">
-              <a:buNone/>
-            </a:pPr>
-            <a:r>
-              <a:rPr lang="en-US" sz="1700" b="1" dirty="0">
-                <a:solidFill>
-                  <a:srgbClr val="1C2230"/>
-                </a:solidFill>
-                <a:latin typeface="Calibri" pitchFamily="34" charset="0"/>
-                <a:ea typeface="Calibri" pitchFamily="34" charset="-122"/>
-                <a:cs typeface="Calibri" pitchFamily="34" charset="-120"/>
-              </a:rPr>
-              <a:t>Clone the workspace branch</a:t>
-            </a:r>
-            <a:endParaRPr lang="en-US" sz="1700" dirty="0"/>
-          </a:p>
-        </p:txBody>
-      </p:sp>
-      <p:sp>
-        <p:nvSpPr>
-          <p:cNvPr id="8" name="Text 6"/>
-          <p:cNvSpPr/>
-          <p:nvPr/>
-        </p:nvSpPr>
-        <p:spPr>
-          <a:xfrm>
-            <a:off x="1051560" y="1618488"/>
-            <a:ext cx="3566160" cy="274320"/>
-          </a:xfrm>
-          <a:prstGeom prst="rect">
-            <a:avLst/>
-          </a:prstGeom>
-          <a:noFill/>
-          <a:ln/>
-        </p:spPr>
-        <p:txBody>
-          <a:bodyPr wrap="square" lIns="0" tIns="0" rIns="0" bIns="0" rtlCol="0" anchor="ctr"/>
-          <a:lstStyle/>
-          <a:p>
-            <a:pPr indent="0" marL="0">
-              <a:buNone/>
-            </a:pPr>
-            <a:r>
-              <a:rPr lang="en-US" sz="1250" dirty="0">
-                <a:solidFill>
-                  <a:srgbClr val="5B6475"/>
-                </a:solidFill>
-                <a:latin typeface="Consolas" pitchFamily="34" charset="0"/>
-                <a:ea typeface="Consolas" pitchFamily="34" charset="-122"/>
-                <a:cs typeface="Consolas" pitchFamily="34" charset="-120"/>
-              </a:rPr>
-              <a:t>git clone -b ws/argos-dev &lt;Delphi&gt;</a:t>
-            </a:r>
-            <a:endParaRPr lang="en-US" sz="1250" dirty="0"/>
-          </a:p>
-        </p:txBody>
-      </p:sp>
-      <p:sp>
-        <p:nvSpPr>
-          <p:cNvPr id="9" name="Shape 7"/>
-          <p:cNvSpPr/>
-          <p:nvPr/>
-        </p:nvSpPr>
-        <p:spPr>
-          <a:xfrm>
-            <a:off x="457200" y="2350008"/>
-            <a:ext cx="420624" cy="420624"/>
-          </a:xfrm>
-          <a:prstGeom prst="ellipse">
-            <a:avLst/>
-          </a:prstGeom>
-          <a:solidFill>
-            <a:srgbClr val="C9932E"/>
-          </a:solidFill>
-          <a:ln w="12700">
-            <a:solidFill>
-              <a:srgbClr val="C9932E"/>
-            </a:solidFill>
-            <a:prstDash val="solid"/>
-          </a:ln>
-        </p:spPr>
-      </p:sp>
-      <p:sp>
-        <p:nvSpPr>
-          <p:cNvPr id="10" name="Text 8"/>
-          <p:cNvSpPr/>
-          <p:nvPr/>
-        </p:nvSpPr>
-        <p:spPr>
-          <a:xfrm>
-            <a:off x="457200" y="2350008"/>
-            <a:ext cx="420624" cy="420624"/>
-          </a:xfrm>
-          <a:prstGeom prst="rect">
-            <a:avLst/>
-          </a:prstGeom>
-          <a:noFill/>
-          <a:ln/>
-        </p:spPr>
-        <p:txBody>
-          <a:bodyPr wrap="square" lIns="0" tIns="0" rIns="0" bIns="0" rtlCol="0" anchor="ctr"/>
-          <a:lstStyle/>
-          <a:p>
-            <a:pPr algn="ctr" indent="0" marL="0">
-              <a:buNone/>
-            </a:pPr>
-            <a:r>
-              <a:rPr lang="en-US" sz="1800" b="1" dirty="0">
-                <a:solidFill>
-                  <a:srgbClr val="FFFFFF"/>
-                </a:solidFill>
-                <a:latin typeface="Georgia" pitchFamily="34" charset="0"/>
-                <a:ea typeface="Georgia" pitchFamily="34" charset="-122"/>
-                <a:cs typeface="Georgia" pitchFamily="34" charset="-120"/>
-              </a:rPr>
-              <a:t>2</a:t>
-            </a:r>
-            <a:endParaRPr lang="en-US" sz="1800" dirty="0"/>
-          </a:p>
-        </p:txBody>
-      </p:sp>
-      <p:sp>
-        <p:nvSpPr>
-          <p:cNvPr id="11" name="Text 9"/>
-          <p:cNvSpPr/>
-          <p:nvPr/>
-        </p:nvSpPr>
-        <p:spPr>
-          <a:xfrm>
-            <a:off x="1051560" y="2313432"/>
-            <a:ext cx="3383280" cy="292608"/>
-          </a:xfrm>
-          <a:prstGeom prst="rect">
-            <a:avLst/>
-          </a:prstGeom>
-          <a:noFill/>
-          <a:ln/>
-        </p:spPr>
-        <p:txBody>
-          <a:bodyPr wrap="square" lIns="0" tIns="0" rIns="0" bIns="0" rtlCol="0" anchor="ctr"/>
-          <a:lstStyle/>
-          <a:p>
-            <a:pPr indent="0" marL="0">
-              <a:buNone/>
-            </a:pPr>
-            <a:r>
-              <a:rPr lang="en-US" sz="1700" b="1" dirty="0">
-                <a:solidFill>
-                  <a:srgbClr val="1C2230"/>
-                </a:solidFill>
-                <a:latin typeface="Calibri" pitchFamily="34" charset="0"/>
-                <a:ea typeface="Calibri" pitchFamily="34" charset="-122"/>
-                <a:cs typeface="Calibri" pitchFamily="34" charset="-120"/>
-              </a:rPr>
-              <a:t>Run setup once</a:t>
-            </a:r>
-            <a:endParaRPr lang="en-US" sz="1700" dirty="0"/>
-          </a:p>
-        </p:txBody>
-      </p:sp>
-      <p:sp>
-        <p:nvSpPr>
-          <p:cNvPr id="12" name="Text 10"/>
-          <p:cNvSpPr/>
-          <p:nvPr/>
-        </p:nvSpPr>
-        <p:spPr>
-          <a:xfrm>
-            <a:off x="1051560" y="2642616"/>
-            <a:ext cx="3566160" cy="274320"/>
-          </a:xfrm>
-          <a:prstGeom prst="rect">
-            <a:avLst/>
-          </a:prstGeom>
-          <a:noFill/>
-          <a:ln/>
-        </p:spPr>
-        <p:txBody>
-          <a:bodyPr wrap="square" lIns="0" tIns="0" rIns="0" bIns="0" rtlCol="0" anchor="ctr"/>
-          <a:lstStyle/>
-          <a:p>
-            <a:pPr indent="0" marL="0">
-              <a:buNone/>
-            </a:pPr>
-            <a:r>
-              <a:rPr lang="en-US" sz="1250" dirty="0">
-                <a:solidFill>
-                  <a:srgbClr val="5B6475"/>
-                </a:solidFill>
-                <a:latin typeface="Consolas" pitchFamily="34" charset="0"/>
-                <a:ea typeface="Consolas" pitchFamily="34" charset="-122"/>
-                <a:cs typeface="Consolas" pitchFamily="34" charset="-120"/>
-              </a:rPr>
-              <a:t>.delphi/setup.sh</a:t>
-            </a:r>
-            <a:endParaRPr lang="en-US" sz="1250" dirty="0"/>
-          </a:p>
-        </p:txBody>
-      </p:sp>
-      <p:sp>
-        <p:nvSpPr>
-          <p:cNvPr id="13" name="Shape 11"/>
-          <p:cNvSpPr/>
-          <p:nvPr/>
-        </p:nvSpPr>
-        <p:spPr>
-          <a:xfrm>
-            <a:off x="457200" y="3374136"/>
-            <a:ext cx="420624" cy="420624"/>
-          </a:xfrm>
-          <a:prstGeom prst="ellipse">
-            <a:avLst/>
-          </a:prstGeom>
-          <a:solidFill>
-            <a:srgbClr val="C9932E"/>
-          </a:solidFill>
-          <a:ln w="12700">
-            <a:solidFill>
-              <a:srgbClr val="C9932E"/>
-            </a:solidFill>
-            <a:prstDash val="solid"/>
-          </a:ln>
-        </p:spPr>
-      </p:sp>
-      <p:sp>
-        <p:nvSpPr>
-          <p:cNvPr id="14" name="Text 12"/>
-          <p:cNvSpPr/>
-          <p:nvPr/>
-        </p:nvSpPr>
-        <p:spPr>
-          <a:xfrm>
-            <a:off x="457200" y="3374136"/>
-            <a:ext cx="420624" cy="420624"/>
-          </a:xfrm>
-          <a:prstGeom prst="rect">
-            <a:avLst/>
-          </a:prstGeom>
-          <a:noFill/>
-          <a:ln/>
-        </p:spPr>
-        <p:txBody>
-          <a:bodyPr wrap="square" lIns="0" tIns="0" rIns="0" bIns="0" rtlCol="0" anchor="ctr"/>
-          <a:lstStyle/>
-          <a:p>
-            <a:pPr algn="ctr" indent="0" marL="0">
-              <a:buNone/>
-            </a:pPr>
-            <a:r>
-              <a:rPr lang="en-US" sz="1800" b="1" dirty="0">
-                <a:solidFill>
-                  <a:srgbClr val="FFFFFF"/>
-                </a:solidFill>
-                <a:latin typeface="Georgia" pitchFamily="34" charset="0"/>
-                <a:ea typeface="Georgia" pitchFamily="34" charset="-122"/>
-                <a:cs typeface="Georgia" pitchFamily="34" charset="-120"/>
-              </a:rPr>
-              <a:t>3</a:t>
-            </a:r>
-            <a:endParaRPr lang="en-US" sz="1800" dirty="0"/>
-          </a:p>
-        </p:txBody>
-      </p:sp>
-      <p:sp>
-        <p:nvSpPr>
-          <p:cNvPr id="15" name="Text 13"/>
-          <p:cNvSpPr/>
-          <p:nvPr/>
-        </p:nvSpPr>
-        <p:spPr>
-          <a:xfrm>
-            <a:off x="1051560" y="3337560"/>
-            <a:ext cx="3383280" cy="292608"/>
-          </a:xfrm>
-          <a:prstGeom prst="rect">
-            <a:avLst/>
-          </a:prstGeom>
-          <a:noFill/>
-          <a:ln/>
-        </p:spPr>
-        <p:txBody>
-          <a:bodyPr wrap="square" lIns="0" tIns="0" rIns="0" bIns="0" rtlCol="0" anchor="ctr"/>
-          <a:lstStyle/>
-          <a:p>
-            <a:pPr indent="0" marL="0">
-              <a:buNone/>
-            </a:pPr>
-            <a:r>
-              <a:rPr lang="en-US" sz="1700" b="1" dirty="0">
-                <a:solidFill>
-                  <a:srgbClr val="1C2230"/>
-                </a:solidFill>
-                <a:latin typeface="Calibri" pitchFamily="34" charset="0"/>
-                <a:ea typeface="Calibri" pitchFamily="34" charset="-122"/>
-                <a:cs typeface="Calibri" pitchFamily="34" charset="-120"/>
-              </a:rPr>
-              <a:t>Open Claude Code at the root</a:t>
-            </a:r>
-            <a:endParaRPr lang="en-US" sz="1700" dirty="0"/>
-          </a:p>
-        </p:txBody>
-      </p:sp>
-      <p:sp>
-        <p:nvSpPr>
-          <p:cNvPr id="16" name="Text 14"/>
-          <p:cNvSpPr/>
-          <p:nvPr/>
-        </p:nvSpPr>
-        <p:spPr>
-          <a:xfrm>
-            <a:off x="1051560" y="3666744"/>
-            <a:ext cx="3566160" cy="274320"/>
-          </a:xfrm>
-          <a:prstGeom prst="rect">
-            <a:avLst/>
-          </a:prstGeom>
-          <a:noFill/>
-          <a:ln/>
-        </p:spPr>
-        <p:txBody>
-          <a:bodyPr wrap="square" lIns="0" tIns="0" rIns="0" bIns="0" rtlCol="0" anchor="ctr"/>
-          <a:lstStyle/>
-          <a:p>
-            <a:pPr indent="0" marL="0">
-              <a:buNone/>
-            </a:pPr>
-            <a:r>
-              <a:rPr lang="en-US" sz="1400" dirty="0">
-                <a:solidFill>
-                  <a:srgbClr val="5B6475"/>
-                </a:solidFill>
-                <a:latin typeface="Calibri" pitchFamily="34" charset="0"/>
-                <a:ea typeface="Calibri" pitchFamily="34" charset="-122"/>
-                <a:cs typeface="Calibri" pitchFamily="34" charset="-120"/>
-              </a:rPr>
-              <a:t>skills, glossary and repos are all there</a:t>
-            </a:r>
-            <a:endParaRPr lang="en-US" sz="1400" dirty="0"/>
-          </a:p>
-        </p:txBody>
-      </p:sp>
-      <p:sp>
-        <p:nvSpPr>
-          <p:cNvPr id="17" name="Text 15"/>
-          <p:cNvSpPr/>
-          <p:nvPr/>
-        </p:nvSpPr>
-        <p:spPr>
-          <a:xfrm>
-            <a:off x="457200" y="4224528"/>
-            <a:ext cx="4023360" cy="548640"/>
-          </a:xfrm>
-          <a:prstGeom prst="rect">
-            <a:avLst/>
-          </a:prstGeom>
-          <a:noFill/>
-          <a:ln/>
-        </p:spPr>
-        <p:txBody>
-          <a:bodyPr wrap="square" lIns="0" tIns="0" rIns="0" bIns="0" rtlCol="0" anchor="ctr"/>
-          <a:lstStyle/>
-          <a:p>
-            <a:pPr indent="0" marL="0">
-              <a:buNone/>
-            </a:pPr>
-            <a:r>
-              <a:rPr lang="en-US" sz="1300" i="1" dirty="0">
-                <a:solidFill>
-                  <a:srgbClr val="1C2230"/>
-                </a:solidFill>
-                <a:latin typeface="Calibri" pitchFamily="34" charset="0"/>
-                <a:ea typeface="Calibri" pitchFamily="34" charset="-122"/>
-                <a:cs typeface="Calibri" pitchFamily="34" charset="-120"/>
-              </a:rPr>
-              <a:t>Edits to the context go back as a PR into ws/argos-dev. Code changes stay in the code repo's own PRs.</a:t>
-            </a:r>
-            <a:endParaRPr lang="en-US" sz="1300" dirty="0"/>
-          </a:p>
-        </p:txBody>
-      </p:sp>
-      <p:pic>
-        <p:nvPicPr>
-          <p:cNvPr id="18" name="Image 0" descr="/private/tmp/claude-501/-Users-wyattbracy-Desktop-ner-app-software-Delphi/3a53aefc-b6fc-4748-b97c-ca799d718193/scratchpad/build/img/checkout.png">    </p:cNvPr>
-          <p:cNvPicPr>
-            <a:picLocks noChangeAspect="1"/>
-          </p:cNvPicPr>
-          <p:nvPr/>
-        </p:nvPicPr>
-        <p:blipFill>
-          <a:blip r:embed="rId1"/>
-          <a:stretch>
-            <a:fillRect/>
-          </a:stretch>
-        </p:blipFill>
-        <p:spPr>
-          <a:xfrm>
-            <a:off x="4896853" y="1188720"/>
-            <a:ext cx="3789947" cy="3520440"/>
-          </a:xfrm>
-          <a:prstGeom prst="rect">
-            <a:avLst/>
-          </a:prstGeom>
-        </p:spPr>
-      </p:pic>
+            <a:endParaRPr lang="en-US" sz="2250" dirty="0"/>
+          </a:p>
+        </p:txBody>
+      </p:sp>
     </p:spTree>
   </p:cSld>
   <p:clrMapOvr>
@@ -2544,26 +2610,50 @@
           <a:chExt cx="0" cy="0"/>
         </a:xfrm>
       </p:grpSpPr>
-      <p:sp>
-        <p:nvSpPr>
-          <p:cNvPr id="2" name="Shape 0"/>
+      <p:pic>
+        <p:nvPicPr>
+          <p:cNvPr id="2" name="Image 0" descr="/private/tmp/claude-501/-Users-wyattbracy-Desktop-ner-app-software-Delphi/28e5bd69-bc06-4d46-875e-7c63334f5a2a/scratchpad/build/out/pptx/04.png">    </p:cNvPr>
+          <p:cNvPicPr>
+            <a:picLocks noChangeAspect="1"/>
+          </p:cNvPicPr>
+          <p:nvPr/>
+        </p:nvPicPr>
+        <p:blipFill>
+          <a:blip r:embed="rId1"/>
+          <a:stretch>
+            <a:fillRect/>
+          </a:stretch>
+        </p:blipFill>
+        <p:spPr>
+          <a:xfrm>
+            <a:off x="0" y="0"/>
+            <a:ext cx="9144000" cy="5143500"/>
+          </a:xfrm>
+          <a:prstGeom prst="rect">
+            <a:avLst/>
+          </a:prstGeom>
+        </p:spPr>
+      </p:pic>
+      <p:sp>
+        <p:nvSpPr>
+          <p:cNvPr id="3" name="Shape 0"/>
           <p:cNvSpPr/>
           <p:nvPr/>
         </p:nvSpPr>
         <p:spPr>
           <a:xfrm>
-            <a:off x="457200" y="329184"/>
-            <a:ext cx="109728" cy="109728"/>
+            <a:off x="457200" y="331470"/>
+            <a:ext cx="85725" cy="85725"/>
           </a:xfrm>
           <a:prstGeom prst="rect">
             <a:avLst/>
           </a:prstGeom>
           <a:solidFill>
-            <a:srgbClr val="C9932E"/>
+            <a:srgbClr val="B9821F"/>
           </a:solidFill>
           <a:ln w="12700">
             <a:solidFill>
-              <a:srgbClr val="C9932E"/>
+              <a:srgbClr val="B9821F"/>
             </a:solidFill>
             <a:prstDash val="solid"/>
           </a:ln>
@@ -2571,14 +2661,14 @@
       </p:sp>
       <p:sp>
         <p:nvSpPr>
-          <p:cNvPr id="3" name="Text 1"/>
+          <p:cNvPr id="4" name="Text 1"/>
           <p:cNvSpPr/>
           <p:nvPr/>
         </p:nvSpPr>
         <p:spPr>
           <a:xfrm>
-            <a:off x="640080" y="256032"/>
-            <a:ext cx="5486400" cy="256032"/>
+            <a:off x="617220" y="297180"/>
+            <a:ext cx="6400800" cy="148590"/>
           </a:xfrm>
           <a:prstGeom prst="rect">
             <a:avLst/>
@@ -2594,30 +2684,30 @@
               <a:buNone/>
             </a:pPr>
             <a:r>
-              <a:rPr lang="en-US" sz="1100" b="1" spc="300" kern="0" dirty="0">
+              <a:rPr lang="en-US" sz="810" b="1" spc="160" kern="0" dirty="0">
                 <a:solidFill>
-                  <a:srgbClr val="C9932E"/>
+                  <a:srgbClr val="B9821F"/>
                 </a:solidFill>
-                <a:latin typeface="Calibri" pitchFamily="34" charset="0"/>
-                <a:ea typeface="Calibri" pitchFamily="34" charset="-122"/>
-                <a:cs typeface="Calibri" pitchFamily="34" charset="-120"/>
+                <a:latin typeface="Helvetica Neue" pitchFamily="34" charset="0"/>
+                <a:ea typeface="Helvetica Neue" pitchFamily="34" charset="-122"/>
+                <a:cs typeface="Helvetica Neue" pitchFamily="34" charset="-120"/>
               </a:rPr>
-              <a:t>WHY WE BUILT IT</a:t>
+              <a:t>WORKSPACE.YML  →  DISK</a:t>
             </a:r>
-            <a:endParaRPr lang="en-US" sz="1100" dirty="0"/>
-          </a:p>
-        </p:txBody>
-      </p:sp>
-      <p:sp>
-        <p:nvSpPr>
-          <p:cNvPr id="4" name="Text 2"/>
+            <a:endParaRPr lang="en-US" sz="810" dirty="0"/>
+          </a:p>
+        </p:txBody>
+      </p:sp>
+      <p:sp>
+        <p:nvSpPr>
+          <p:cNvPr id="5" name="Text 2"/>
           <p:cNvSpPr/>
           <p:nvPr/>
         </p:nvSpPr>
         <p:spPr>
           <a:xfrm>
-            <a:off x="457200" y="512064"/>
-            <a:ext cx="8229600" cy="502920"/>
+            <a:off x="457200" y="502920"/>
+            <a:ext cx="8229600" cy="365760"/>
           </a:xfrm>
           <a:prstGeom prst="rect">
             <a:avLst/>
@@ -2626,14 +2716,16 @@
           <a:ln/>
         </p:spPr>
         <p:txBody>
-          <a:bodyPr wrap="square" lIns="0" tIns="0" rIns="0" bIns="0" rtlCol="0" anchor="ctr"/>
+          <a:bodyPr wrap="square" lIns="0" tIns="0" rIns="0" bIns="0" rtlCol="0" anchor="ctr">
+            <a:normAutofit/>
+          </a:bodyPr>
           <a:lstStyle/>
           <a:p>
             <a:pPr indent="0" marL="0">
               <a:buNone/>
             </a:pPr>
             <a:r>
-              <a:rPr lang="en-US" sz="2800" b="1" dirty="0">
+              <a:rPr lang="en-US" sz="2250" b="1" dirty="0">
                 <a:solidFill>
                   <a:srgbClr val="1C2230"/>
                 </a:solidFill>
@@ -2641,342 +2733,9 @@
                 <a:ea typeface="Georgia" pitchFamily="34" charset="-122"/>
                 <a:cs typeface="Georgia" pitchFamily="34" charset="-120"/>
               </a:rPr>
-              <a:t>Real workflows outgrow single-repo skills</a:t>
+              <a:t>Each key turns into something in your clone</a:t>
             </a:r>
-            <a:endParaRPr lang="en-US" sz="2800" dirty="0"/>
-          </a:p>
-        </p:txBody>
-      </p:sp>
-      <p:pic>
-        <p:nvPicPr>
-          <p:cNvPr id="5" name="Image 0" descr="/private/tmp/claude-501/-Users-wyattbracy-Desktop-ner-app-software-Delphi/3a53aefc-b6fc-4748-b97c-ca799d718193/scratchpad/build/img/why.png">    </p:cNvPr>
-          <p:cNvPicPr>
-            <a:picLocks noChangeAspect="1"/>
-          </p:cNvPicPr>
-          <p:nvPr/>
-        </p:nvPicPr>
-        <p:blipFill>
-          <a:blip r:embed="rId1"/>
-          <a:stretch>
-            <a:fillRect/>
-          </a:stretch>
-        </p:blipFill>
-        <p:spPr>
-          <a:xfrm>
-            <a:off x="411480" y="1188720"/>
-            <a:ext cx="5212080" cy="3253057"/>
-          </a:xfrm>
-          <a:prstGeom prst="rect">
-            <a:avLst/>
-          </a:prstGeom>
-        </p:spPr>
-      </p:pic>
-      <p:sp>
-        <p:nvSpPr>
-          <p:cNvPr id="6" name="Shape 3"/>
-          <p:cNvSpPr/>
-          <p:nvPr/>
-        </p:nvSpPr>
-        <p:spPr>
-          <a:xfrm>
-            <a:off x="5897880" y="1325880"/>
-            <a:ext cx="54864" cy="868680"/>
-          </a:xfrm>
-          <a:prstGeom prst="rect">
-            <a:avLst/>
-          </a:prstGeom>
-          <a:solidFill>
-            <a:srgbClr val="C9932E"/>
-          </a:solidFill>
-          <a:ln w="12700">
-            <a:solidFill>
-              <a:srgbClr val="C9932E"/>
-            </a:solidFill>
-            <a:prstDash val="solid"/>
-          </a:ln>
-        </p:spPr>
-      </p:sp>
-      <p:sp>
-        <p:nvSpPr>
-          <p:cNvPr id="7" name="Text 4"/>
-          <p:cNvSpPr/>
-          <p:nvPr/>
-        </p:nvSpPr>
-        <p:spPr>
-          <a:xfrm>
-            <a:off x="6080760" y="1325880"/>
-            <a:ext cx="2651760" cy="292608"/>
-          </a:xfrm>
-          <a:prstGeom prst="rect">
-            <a:avLst/>
-          </a:prstGeom>
-          <a:noFill/>
-          <a:ln/>
-        </p:spPr>
-        <p:txBody>
-          <a:bodyPr wrap="square" lIns="0" tIns="0" rIns="0" bIns="0" rtlCol="0" anchor="ctr"/>
-          <a:lstStyle/>
-          <a:p>
-            <a:pPr indent="0" marL="0">
-              <a:buNone/>
-            </a:pPr>
-            <a:r>
-              <a:rPr lang="en-US" sz="1500" b="1" dirty="0">
-                <a:solidFill>
-                  <a:srgbClr val="1C2230"/>
-                </a:solidFill>
-                <a:latin typeface="Calibri" pitchFamily="34" charset="0"/>
-                <a:ea typeface="Calibri" pitchFamily="34" charset="-122"/>
-                <a:cs typeface="Calibri" pitchFamily="34" charset="-120"/>
-              </a:rPr>
-              <a:t>Work crosses repos</a:t>
-            </a:r>
-            <a:endParaRPr lang="en-US" sz="1500" dirty="0"/>
-          </a:p>
-        </p:txBody>
-      </p:sp>
-      <p:sp>
-        <p:nvSpPr>
-          <p:cNvPr id="8" name="Text 5"/>
-          <p:cNvSpPr/>
-          <p:nvPr/>
-        </p:nvSpPr>
-        <p:spPr>
-          <a:xfrm>
-            <a:off x="6080760" y="1636776"/>
-            <a:ext cx="2651760" cy="603504"/>
-          </a:xfrm>
-          <a:prstGeom prst="rect">
-            <a:avLst/>
-          </a:prstGeom>
-          <a:noFill/>
-          <a:ln/>
-        </p:spPr>
-        <p:txBody>
-          <a:bodyPr wrap="square" lIns="0" tIns="0" rIns="0" bIns="0" rtlCol="0" anchor="t"/>
-          <a:lstStyle/>
-          <a:p>
-            <a:pPr indent="0" marL="0">
-              <a:buNone/>
-            </a:pPr>
-            <a:r>
-              <a:rPr lang="en-US" sz="1250" dirty="0">
-                <a:solidFill>
-                  <a:srgbClr val="5B6475"/>
-                </a:solidFill>
-                <a:latin typeface="Calibri" pitchFamily="34" charset="0"/>
-                <a:ea typeface="Calibri" pitchFamily="34" charset="-122"/>
-                <a:cs typeface="Calibri" pitchFamily="34" charset="-120"/>
-              </a:rPr>
-              <a:t>An Argos ticket needs Odyssey-Definitions schemas and the real source of its dependencies.</a:t>
-            </a:r>
-            <a:endParaRPr lang="en-US" sz="1250" dirty="0"/>
-          </a:p>
-        </p:txBody>
-      </p:sp>
-      <p:sp>
-        <p:nvSpPr>
-          <p:cNvPr id="9" name="Shape 6"/>
-          <p:cNvSpPr/>
-          <p:nvPr/>
-        </p:nvSpPr>
-        <p:spPr>
-          <a:xfrm>
-            <a:off x="5897880" y="2468880"/>
-            <a:ext cx="54864" cy="868680"/>
-          </a:xfrm>
-          <a:prstGeom prst="rect">
-            <a:avLst/>
-          </a:prstGeom>
-          <a:solidFill>
-            <a:srgbClr val="C9932E"/>
-          </a:solidFill>
-          <a:ln w="12700">
-            <a:solidFill>
-              <a:srgbClr val="C9932E"/>
-            </a:solidFill>
-            <a:prstDash val="solid"/>
-          </a:ln>
-        </p:spPr>
-      </p:sp>
-      <p:sp>
-        <p:nvSpPr>
-          <p:cNvPr id="10" name="Text 7"/>
-          <p:cNvSpPr/>
-          <p:nvPr/>
-        </p:nvSpPr>
-        <p:spPr>
-          <a:xfrm>
-            <a:off x="6080760" y="2468880"/>
-            <a:ext cx="2651760" cy="292608"/>
-          </a:xfrm>
-          <a:prstGeom prst="rect">
-            <a:avLst/>
-          </a:prstGeom>
-          <a:noFill/>
-          <a:ln/>
-        </p:spPr>
-        <p:txBody>
-          <a:bodyPr wrap="square" lIns="0" tIns="0" rIns="0" bIns="0" rtlCol="0" anchor="ctr"/>
-          <a:lstStyle/>
-          <a:p>
-            <a:pPr indent="0" marL="0">
-              <a:buNone/>
-            </a:pPr>
-            <a:r>
-              <a:rPr lang="en-US" sz="1500" b="1" dirty="0">
-                <a:solidFill>
-                  <a:srgbClr val="1C2230"/>
-                </a:solidFill>
-                <a:latin typeface="Calibri" pitchFamily="34" charset="0"/>
-                <a:ea typeface="Calibri" pitchFamily="34" charset="-122"/>
-                <a:cs typeface="Calibri" pitchFamily="34" charset="-120"/>
-              </a:rPr>
-              <a:t>One workspace per purpose</a:t>
-            </a:r>
-            <a:endParaRPr lang="en-US" sz="1500" dirty="0"/>
-          </a:p>
-        </p:txBody>
-      </p:sp>
-      <p:sp>
-        <p:nvSpPr>
-          <p:cNvPr id="11" name="Text 8"/>
-          <p:cNvSpPr/>
-          <p:nvPr/>
-        </p:nvSpPr>
-        <p:spPr>
-          <a:xfrm>
-            <a:off x="6080760" y="2779776"/>
-            <a:ext cx="2651760" cy="603504"/>
-          </a:xfrm>
-          <a:prstGeom prst="rect">
-            <a:avLst/>
-          </a:prstGeom>
-          <a:noFill/>
-          <a:ln/>
-        </p:spPr>
-        <p:txBody>
-          <a:bodyPr wrap="square" lIns="0" tIns="0" rIns="0" bIns="0" rtlCol="0" anchor="t"/>
-          <a:lstStyle/>
-          <a:p>
-            <a:pPr indent="0" marL="0">
-              <a:buNone/>
-            </a:pPr>
-            <a:r>
-              <a:rPr lang="en-US" sz="1250" dirty="0">
-                <a:solidFill>
-                  <a:srgbClr val="5B6475"/>
-                </a:solidFill>
-                <a:latin typeface="Calibri" pitchFamily="34" charset="0"/>
-                <a:ea typeface="Calibri" pitchFamily="34" charset="-122"/>
-                <a:cs typeface="Calibri" pitchFamily="34" charset="-120"/>
-              </a:rPr>
-              <a:t>argos-dev and experimental share code but carry different skills.</a:t>
-            </a:r>
-            <a:endParaRPr lang="en-US" sz="1250" dirty="0"/>
-          </a:p>
-        </p:txBody>
-      </p:sp>
-      <p:sp>
-        <p:nvSpPr>
-          <p:cNvPr id="12" name="Shape 9"/>
-          <p:cNvSpPr/>
-          <p:nvPr/>
-        </p:nvSpPr>
-        <p:spPr>
-          <a:xfrm>
-            <a:off x="5897880" y="3611880"/>
-            <a:ext cx="54864" cy="868680"/>
-          </a:xfrm>
-          <a:prstGeom prst="rect">
-            <a:avLst/>
-          </a:prstGeom>
-          <a:solidFill>
-            <a:srgbClr val="C9932E"/>
-          </a:solidFill>
-          <a:ln w="12700">
-            <a:solidFill>
-              <a:srgbClr val="C9932E"/>
-            </a:solidFill>
-            <a:prstDash val="solid"/>
-          </a:ln>
-        </p:spPr>
-      </p:sp>
-      <p:sp>
-        <p:nvSpPr>
-          <p:cNvPr id="13" name="Text 10"/>
-          <p:cNvSpPr/>
-          <p:nvPr/>
-        </p:nvSpPr>
-        <p:spPr>
-          <a:xfrm>
-            <a:off x="6080760" y="3611880"/>
-            <a:ext cx="2651760" cy="292608"/>
-          </a:xfrm>
-          <a:prstGeom prst="rect">
-            <a:avLst/>
-          </a:prstGeom>
-          <a:noFill/>
-          <a:ln/>
-        </p:spPr>
-        <p:txBody>
-          <a:bodyPr wrap="square" lIns="0" tIns="0" rIns="0" bIns="0" rtlCol="0" anchor="ctr"/>
-          <a:lstStyle/>
-          <a:p>
-            <a:pPr indent="0" marL="0">
-              <a:buNone/>
-            </a:pPr>
-            <a:r>
-              <a:rPr lang="en-US" sz="1500" b="1" dirty="0">
-                <a:solidFill>
-                  <a:srgbClr val="1C2230"/>
-                </a:solidFill>
-                <a:latin typeface="Calibri" pitchFamily="34" charset="0"/>
-                <a:ea typeface="Calibri" pitchFamily="34" charset="-122"/>
-                <a:cs typeface="Calibri" pitchFamily="34" charset="-120"/>
-              </a:rPr>
-              <a:t>Fixes flow back to everyone</a:t>
-            </a:r>
-            <a:endParaRPr lang="en-US" sz="1500" dirty="0"/>
-          </a:p>
-        </p:txBody>
-      </p:sp>
-      <p:sp>
-        <p:nvSpPr>
-          <p:cNvPr id="14" name="Text 11"/>
-          <p:cNvSpPr/>
-          <p:nvPr/>
-        </p:nvSpPr>
-        <p:spPr>
-          <a:xfrm>
-            <a:off x="6080760" y="3922776"/>
-            <a:ext cx="2651760" cy="603504"/>
-          </a:xfrm>
-          <a:prstGeom prst="rect">
-            <a:avLst/>
-          </a:prstGeom>
-          <a:noFill/>
-          <a:ln/>
-        </p:spPr>
-        <p:txBody>
-          <a:bodyPr wrap="square" lIns="0" tIns="0" rIns="0" bIns="0" rtlCol="0" anchor="t"/>
-          <a:lstStyle/>
-          <a:p>
-            <a:pPr indent="0" marL="0">
-              <a:buNone/>
-            </a:pPr>
-            <a:r>
-              <a:rPr lang="en-US" sz="1250" dirty="0">
-                <a:solidFill>
-                  <a:srgbClr val="5B6475"/>
-                </a:solidFill>
-                <a:latin typeface="Calibri" pitchFamily="34" charset="0"/>
-                <a:ea typeface="Calibri" pitchFamily="34" charset="-122"/>
-                <a:cs typeface="Calibri" pitchFamily="34" charset="-120"/>
-              </a:rPr>
-              <a:t>A better skill merges into Delphi with no code PR; the next clone has it.</a:t>
-            </a:r>
-            <a:endParaRPr lang="en-US" sz="1250" dirty="0"/>
+            <a:endParaRPr lang="en-US" sz="2250" dirty="0"/>
           </a:p>
         </p:txBody>
       </p:sp>
@@ -3012,26 +2771,50 @@
           <a:chExt cx="0" cy="0"/>
         </a:xfrm>
       </p:grpSpPr>
-      <p:sp>
-        <p:nvSpPr>
-          <p:cNvPr id="2" name="Shape 0"/>
+      <p:pic>
+        <p:nvPicPr>
+          <p:cNvPr id="2" name="Image 0" descr="/private/tmp/claude-501/-Users-wyattbracy-Desktop-ner-app-software-Delphi/28e5bd69-bc06-4d46-875e-7c63334f5a2a/scratchpad/build/out/pptx/05.png">    </p:cNvPr>
+          <p:cNvPicPr>
+            <a:picLocks noChangeAspect="1"/>
+          </p:cNvPicPr>
+          <p:nvPr/>
+        </p:nvPicPr>
+        <p:blipFill>
+          <a:blip r:embed="rId1"/>
+          <a:stretch>
+            <a:fillRect/>
+          </a:stretch>
+        </p:blipFill>
+        <p:spPr>
+          <a:xfrm>
+            <a:off x="0" y="0"/>
+            <a:ext cx="9144000" cy="5143500"/>
+          </a:xfrm>
+          <a:prstGeom prst="rect">
+            <a:avLst/>
+          </a:prstGeom>
+        </p:spPr>
+      </p:pic>
+      <p:sp>
+        <p:nvSpPr>
+          <p:cNvPr id="3" name="Shape 0"/>
           <p:cNvSpPr/>
           <p:nvPr/>
         </p:nvSpPr>
         <p:spPr>
           <a:xfrm>
-            <a:off x="457200" y="329184"/>
-            <a:ext cx="109728" cy="109728"/>
+            <a:off x="457200" y="331470"/>
+            <a:ext cx="85725" cy="85725"/>
           </a:xfrm>
           <a:prstGeom prst="rect">
             <a:avLst/>
           </a:prstGeom>
           <a:solidFill>
-            <a:srgbClr val="C9932E"/>
+            <a:srgbClr val="B9821F"/>
           </a:solidFill>
           <a:ln w="12700">
             <a:solidFill>
-              <a:srgbClr val="C9932E"/>
+              <a:srgbClr val="B9821F"/>
             </a:solidFill>
             <a:prstDash val="solid"/>
           </a:ln>
@@ -3039,14 +2822,14 @@
       </p:sp>
       <p:sp>
         <p:nvSpPr>
-          <p:cNvPr id="3" name="Text 1"/>
+          <p:cNvPr id="4" name="Text 1"/>
           <p:cNvSpPr/>
           <p:nvPr/>
         </p:nvSpPr>
         <p:spPr>
           <a:xfrm>
-            <a:off x="640080" y="256032"/>
-            <a:ext cx="5486400" cy="256032"/>
+            <a:off x="617220" y="297180"/>
+            <a:ext cx="6400800" cy="148590"/>
           </a:xfrm>
           <a:prstGeom prst="rect">
             <a:avLst/>
@@ -3062,30 +2845,30 @@
               <a:buNone/>
             </a:pPr>
             <a:r>
-              <a:rPr lang="en-US" sz="1100" b="1" spc="300" kern="0" dirty="0">
+              <a:rPr lang="en-US" sz="810" b="1" spc="160" kern="0" dirty="0">
                 <a:solidFill>
-                  <a:srgbClr val="C9932E"/>
+                  <a:srgbClr val="B9821F"/>
                 </a:solidFill>
-                <a:latin typeface="Calibri" pitchFamily="34" charset="0"/>
-                <a:ea typeface="Calibri" pitchFamily="34" charset="-122"/>
-                <a:cs typeface="Calibri" pitchFamily="34" charset="-120"/>
+                <a:latin typeface="Helvetica Neue" pitchFamily="34" charset="0"/>
+                <a:ea typeface="Helvetica Neue" pitchFamily="34" charset="-122"/>
+                <a:cs typeface="Helvetica Neue" pitchFamily="34" charset="-120"/>
               </a:rPr>
-              <a:t>EXAMPLE WORKFLOW</a:t>
+              <a:t>WHERE THINGS COME FROM</a:t>
             </a:r>
-            <a:endParaRPr lang="en-US" sz="1100" dirty="0"/>
-          </a:p>
-        </p:txBody>
-      </p:sp>
-      <p:sp>
-        <p:nvSpPr>
-          <p:cNvPr id="4" name="Text 2"/>
+            <a:endParaRPr lang="en-US" sz="810" dirty="0"/>
+          </a:p>
+        </p:txBody>
+      </p:sp>
+      <p:sp>
+        <p:nvSpPr>
+          <p:cNvPr id="5" name="Text 2"/>
           <p:cNvSpPr/>
           <p:nvPr/>
         </p:nvSpPr>
         <p:spPr>
           <a:xfrm>
-            <a:off x="457200" y="512064"/>
-            <a:ext cx="8229600" cy="502920"/>
+            <a:off x="457200" y="502920"/>
+            <a:ext cx="8229600" cy="365760"/>
           </a:xfrm>
           <a:prstGeom prst="rect">
             <a:avLst/>
@@ -3094,14 +2877,16 @@
           <a:ln/>
         </p:spPr>
         <p:txBody>
-          <a:bodyPr wrap="square" lIns="0" tIns="0" rIns="0" bIns="0" rtlCol="0" anchor="ctr"/>
+          <a:bodyPr wrap="square" lIns="0" tIns="0" rIns="0" bIns="0" rtlCol="0" anchor="ctr">
+            <a:normAutofit/>
+          </a:bodyPr>
           <a:lstStyle/>
           <a:p>
             <a:pPr indent="0" marL="0">
               <a:buNone/>
             </a:pPr>
             <a:r>
-              <a:rPr lang="en-US" sz="2800" b="1" dirty="0">
+              <a:rPr lang="en-US" sz="2250" b="1" dirty="0">
                 <a:solidFill>
                   <a:srgbClr val="1C2230"/>
                 </a:solidFill>
@@ -3109,86 +2894,9 @@
                 <a:ea typeface="Georgia" pitchFamily="34" charset="-122"/>
                 <a:cs typeface="Georgia" pitchFamily="34" charset="-120"/>
               </a:rPr>
-              <a:t>One ticket, two things get better</a:t>
+              <a:t>Every file in your clone has one source</a:t>
             </a:r>
-            <a:endParaRPr lang="en-US" sz="2800" dirty="0"/>
-          </a:p>
-        </p:txBody>
-      </p:sp>
-      <p:pic>
-        <p:nvPicPr>
-          <p:cNvPr id="5" name="Image 0" descr="/private/tmp/claude-501/-Users-wyattbracy-Desktop-ner-app-software-Delphi/3a53aefc-b6fc-4748-b97c-ca799d718193/scratchpad/build/img/workflow.png">    </p:cNvPr>
-          <p:cNvPicPr>
-            <a:picLocks noChangeAspect="1"/>
-          </p:cNvPicPr>
-          <p:nvPr/>
-        </p:nvPicPr>
-        <p:blipFill>
-          <a:blip r:embed="rId1"/>
-          <a:stretch>
-            <a:fillRect/>
-          </a:stretch>
-        </p:blipFill>
-        <p:spPr>
-          <a:xfrm>
-            <a:off x="365760" y="1234440"/>
-            <a:ext cx="8412480" cy="2743200"/>
-          </a:xfrm>
-          <a:prstGeom prst="rect">
-            <a:avLst/>
-          </a:prstGeom>
-        </p:spPr>
-      </p:pic>
-      <p:sp>
-        <p:nvSpPr>
-          <p:cNvPr id="6" name="Text 3"/>
-          <p:cNvSpPr/>
-          <p:nvPr/>
-        </p:nvSpPr>
-        <p:spPr>
-          <a:xfrm>
-            <a:off x="457200" y="4251960"/>
-            <a:ext cx="8229600" cy="411480"/>
-          </a:xfrm>
-          <a:prstGeom prst="rect">
-            <a:avLst/>
-          </a:prstGeom>
-          <a:noFill/>
-          <a:ln/>
-        </p:spPr>
-        <p:txBody>
-          <a:bodyPr wrap="square" lIns="0" tIns="0" rIns="0" bIns="0" rtlCol="0" anchor="ctr"/>
-          <a:lstStyle/>
-          <a:p>
-            <a:pPr indent="0" marL="0">
-              <a:buNone/>
-            </a:pPr>
-            <a:r>
-              <a:rPr lang="en-US" sz="1400" b="1" dirty="0">
-                <a:solidFill>
-                  <a:srgbClr val="1C2230"/>
-                </a:solidFill>
-                <a:latin typeface="Calibri" pitchFamily="34" charset="0"/>
-                <a:ea typeface="Calibri" pitchFamily="34" charset="-122"/>
-                <a:cs typeface="Calibri" pitchFamily="34" charset="-120"/>
-              </a:rPr>
-              <a:t>Code ships through Argos PRs. </a:t>
-            </a:r>
-            <a:pPr indent="0" marL="0">
-              <a:buNone/>
-            </a:pPr>
-            <a:r>
-              <a:rPr lang="en-US" sz="1400" dirty="0">
-                <a:solidFill>
-                  <a:srgbClr val="5B6475"/>
-                </a:solidFill>
-                <a:latin typeface="Calibri" pitchFamily="34" charset="0"/>
-                <a:ea typeface="Calibri" pitchFamily="34" charset="-122"/>
-                <a:cs typeface="Calibri" pitchFamily="34" charset="-120"/>
-              </a:rPr>
-              <a:t>What the agent learned ships through Delphi, so the next ticket starts smarter.</a:t>
-            </a:r>
-            <a:endParaRPr lang="en-US" sz="1400" dirty="0"/>
+            <a:endParaRPr lang="en-US" sz="2250" dirty="0"/>
           </a:p>
         </p:txBody>
       </p:sp>
@@ -3224,26 +2932,50 @@
           <a:chExt cx="0" cy="0"/>
         </a:xfrm>
       </p:grpSpPr>
-      <p:sp>
-        <p:nvSpPr>
-          <p:cNvPr id="2" name="Shape 0"/>
+      <p:pic>
+        <p:nvPicPr>
+          <p:cNvPr id="2" name="Image 0" descr="/private/tmp/claude-501/-Users-wyattbracy-Desktop-ner-app-software-Delphi/28e5bd69-bc06-4d46-875e-7c63334f5a2a/scratchpad/build/out/pptx/06.png">    </p:cNvPr>
+          <p:cNvPicPr>
+            <a:picLocks noChangeAspect="1"/>
+          </p:cNvPicPr>
+          <p:nvPr/>
+        </p:nvPicPr>
+        <p:blipFill>
+          <a:blip r:embed="rId1"/>
+          <a:stretch>
+            <a:fillRect/>
+          </a:stretch>
+        </p:blipFill>
+        <p:spPr>
+          <a:xfrm>
+            <a:off x="0" y="0"/>
+            <a:ext cx="9144000" cy="5143500"/>
+          </a:xfrm>
+          <a:prstGeom prst="rect">
+            <a:avLst/>
+          </a:prstGeom>
+        </p:spPr>
+      </p:pic>
+      <p:sp>
+        <p:nvSpPr>
+          <p:cNvPr id="3" name="Shape 0"/>
           <p:cNvSpPr/>
           <p:nvPr/>
         </p:nvSpPr>
         <p:spPr>
           <a:xfrm>
-            <a:off x="457200" y="329184"/>
-            <a:ext cx="109728" cy="109728"/>
+            <a:off x="457200" y="331470"/>
+            <a:ext cx="85725" cy="85725"/>
           </a:xfrm>
           <a:prstGeom prst="rect">
             <a:avLst/>
           </a:prstGeom>
           <a:solidFill>
-            <a:srgbClr val="C9932E"/>
+            <a:srgbClr val="B9821F"/>
           </a:solidFill>
           <a:ln w="12700">
             <a:solidFill>
-              <a:srgbClr val="C9932E"/>
+              <a:srgbClr val="B9821F"/>
             </a:solidFill>
             <a:prstDash val="solid"/>
           </a:ln>
@@ -3251,14 +2983,14 @@
       </p:sp>
       <p:sp>
         <p:nvSpPr>
-          <p:cNvPr id="3" name="Text 1"/>
+          <p:cNvPr id="4" name="Text 1"/>
           <p:cNvSpPr/>
           <p:nvPr/>
         </p:nvSpPr>
         <p:spPr>
           <a:xfrm>
-            <a:off x="640080" y="256032"/>
-            <a:ext cx="5486400" cy="256032"/>
+            <a:off x="617220" y="297180"/>
+            <a:ext cx="6400800" cy="148590"/>
           </a:xfrm>
           <a:prstGeom prst="rect">
             <a:avLst/>
@@ -3274,30 +3006,30 @@
               <a:buNone/>
             </a:pPr>
             <a:r>
-              <a:rPr lang="en-US" sz="1100" b="1" spc="300" kern="0" dirty="0">
+              <a:rPr lang="en-US" sz="810" b="1" spc="160" kern="0" dirty="0">
                 <a:solidFill>
-                  <a:srgbClr val="C9932E"/>
+                  <a:srgbClr val="B9821F"/>
                 </a:solidFill>
-                <a:latin typeface="Calibri" pitchFamily="34" charset="0"/>
-                <a:ea typeface="Calibri" pitchFamily="34" charset="-122"/>
-                <a:cs typeface="Calibri" pitchFamily="34" charset="-120"/>
+                <a:latin typeface="Helvetica Neue" pitchFamily="34" charset="0"/>
+                <a:ea typeface="Helvetica Neue" pitchFamily="34" charset="-122"/>
+                <a:cs typeface="Helvetica Neue" pitchFamily="34" charset="-120"/>
               </a:rPr>
-              <a:t>INTERNALS  ·  1 / 3</a:t>
+              <a:t>WHERE THINGS COME FROM</a:t>
             </a:r>
-            <a:endParaRPr lang="en-US" sz="1100" dirty="0"/>
-          </a:p>
-        </p:txBody>
-      </p:sp>
-      <p:sp>
-        <p:nvSpPr>
-          <p:cNvPr id="4" name="Text 2"/>
+            <a:endParaRPr lang="en-US" sz="810" dirty="0"/>
+          </a:p>
+        </p:txBody>
+      </p:sp>
+      <p:sp>
+        <p:nvSpPr>
+          <p:cNvPr id="5" name="Text 2"/>
           <p:cNvSpPr/>
           <p:nvPr/>
         </p:nvSpPr>
         <p:spPr>
           <a:xfrm>
-            <a:off x="457200" y="512064"/>
-            <a:ext cx="8229600" cy="502920"/>
+            <a:off x="457200" y="502920"/>
+            <a:ext cx="8229600" cy="365760"/>
           </a:xfrm>
           <a:prstGeom prst="rect">
             <a:avLst/>
@@ -3306,14 +3038,16 @@
           <a:ln/>
         </p:spPr>
         <p:txBody>
-          <a:bodyPr wrap="square" lIns="0" tIns="0" rIns="0" bIns="0" rtlCol="0" anchor="ctr"/>
+          <a:bodyPr wrap="square" lIns="0" tIns="0" rIns="0" bIns="0" rtlCol="0" anchor="ctr">
+            <a:normAutofit/>
+          </a:bodyPr>
           <a:lstStyle/>
           <a:p>
             <a:pPr indent="0" marL="0">
               <a:buNone/>
             </a:pPr>
             <a:r>
-              <a:rPr lang="en-US" sz="2800" b="1" dirty="0">
+              <a:rPr lang="en-US" sz="2250" b="1" dirty="0">
                 <a:solidFill>
                   <a:srgbClr val="1C2230"/>
                 </a:solidFill>
@@ -3321,345 +3055,9 @@
                 <a:ea typeface="Georgia" pitchFamily="34" charset="-122"/>
                 <a:cs typeface="Georgia" pitchFamily="34" charset="-120"/>
               </a:rPr>
-              <a:t>Sync: a folder on main, a branch for you</a:t>
+              <a:t>Three ways context from above reaches a workspace</a:t>
             </a:r>
-            <a:endParaRPr lang="en-US" sz="2800" dirty="0"/>
-          </a:p>
-        </p:txBody>
-      </p:sp>
-      <p:pic>
-        <p:nvPicPr>
-          <p:cNvPr id="5" name="Image 0" descr="/private/tmp/claude-501/-Users-wyattbracy-Desktop-ner-app-software-Delphi/3a53aefc-b6fc-4748-b97c-ca799d718193/scratchpad/build/img/sync.png">    </p:cNvPr>
-          <p:cNvPicPr>
-            <a:picLocks noChangeAspect="1"/>
-          </p:cNvPicPr>
-          <p:nvPr/>
-        </p:nvPicPr>
-        <p:blipFill>
-          <a:blip r:embed="rId1"/>
-          <a:stretch>
-            <a:fillRect/>
-          </a:stretch>
-        </p:blipFill>
-        <p:spPr>
-          <a:xfrm>
-            <a:off x="411480" y="1188720"/>
-            <a:ext cx="4206240" cy="3400790"/>
-          </a:xfrm>
-          <a:prstGeom prst="rect">
-            <a:avLst/>
-          </a:prstGeom>
-        </p:spPr>
-      </p:pic>
-      <p:sp>
-        <p:nvSpPr>
-          <p:cNvPr id="6" name="Text 3"/>
-          <p:cNvSpPr/>
-          <p:nvPr/>
-        </p:nvSpPr>
-        <p:spPr>
-          <a:xfrm>
-            <a:off x="4983480" y="1234440"/>
-            <a:ext cx="3703320" cy="274320"/>
-          </a:xfrm>
-          <a:prstGeom prst="rect">
-            <a:avLst/>
-          </a:prstGeom>
-          <a:noFill/>
-          <a:ln/>
-        </p:spPr>
-        <p:txBody>
-          <a:bodyPr wrap="square" lIns="0" tIns="0" rIns="0" bIns="0" rtlCol="0" anchor="ctr"/>
-          <a:lstStyle/>
-          <a:p>
-            <a:pPr indent="0" marL="0">
-              <a:buNone/>
-            </a:pPr>
-            <a:r>
-              <a:rPr lang="en-US" sz="1500" b="1" dirty="0">
-                <a:solidFill>
-                  <a:srgbClr val="1C2230"/>
-                </a:solidFill>
-                <a:latin typeface="Calibri" pitchFamily="34" charset="0"/>
-                <a:ea typeface="Calibri" pitchFamily="34" charset="-122"/>
-                <a:cs typeface="Calibri" pitchFamily="34" charset="-120"/>
-              </a:rPr>
-              <a:t>Refresh</a:t>
-            </a:r>
-            <a:endParaRPr lang="en-US" sz="1500" dirty="0"/>
-          </a:p>
-        </p:txBody>
-      </p:sp>
-      <p:sp>
-        <p:nvSpPr>
-          <p:cNvPr id="7" name="Text 4"/>
-          <p:cNvSpPr/>
-          <p:nvPr/>
-        </p:nvSpPr>
-        <p:spPr>
-          <a:xfrm>
-            <a:off x="4983480" y="1517904"/>
-            <a:ext cx="3703320" cy="502920"/>
-          </a:xfrm>
-          <a:prstGeom prst="rect">
-            <a:avLst/>
-          </a:prstGeom>
-          <a:noFill/>
-          <a:ln/>
-        </p:spPr>
-        <p:txBody>
-          <a:bodyPr wrap="square" lIns="0" tIns="0" rIns="0" bIns="0" rtlCol="0" anchor="t"/>
-          <a:lstStyle/>
-          <a:p>
-            <a:pPr indent="0" marL="0">
-              <a:buNone/>
-            </a:pPr>
-            <a:r>
-              <a:rPr lang="en-US" sz="1250" dirty="0">
-                <a:solidFill>
-                  <a:srgbClr val="5B6475"/>
-                </a:solidFill>
-                <a:latin typeface="Calibri" pitchFamily="34" charset="0"/>
-                <a:ea typeface="Calibri" pitchFamily="34" charset="-122"/>
-                <a:cs typeface="Calibri" pitchFamily="34" charset="-120"/>
-              </a:rPr>
-              <a:t>Each push to main is merged into every ws/&lt;name&gt;, folder becoming root.</a:t>
-            </a:r>
-            <a:endParaRPr lang="en-US" sz="1250" dirty="0"/>
-          </a:p>
-        </p:txBody>
-      </p:sp>
-      <p:sp>
-        <p:nvSpPr>
-          <p:cNvPr id="8" name="Text 5"/>
-          <p:cNvSpPr/>
-          <p:nvPr/>
-        </p:nvSpPr>
-        <p:spPr>
-          <a:xfrm>
-            <a:off x="4983480" y="2121408"/>
-            <a:ext cx="3703320" cy="274320"/>
-          </a:xfrm>
-          <a:prstGeom prst="rect">
-            <a:avLst/>
-          </a:prstGeom>
-          <a:noFill/>
-          <a:ln/>
-        </p:spPr>
-        <p:txBody>
-          <a:bodyPr wrap="square" lIns="0" tIns="0" rIns="0" bIns="0" rtlCol="0" anchor="ctr"/>
-          <a:lstStyle/>
-          <a:p>
-            <a:pPr indent="0" marL="0">
-              <a:buNone/>
-            </a:pPr>
-            <a:r>
-              <a:rPr lang="en-US" sz="1500" b="1" dirty="0">
-                <a:solidFill>
-                  <a:srgbClr val="1C2230"/>
-                </a:solidFill>
-                <a:latin typeface="Calibri" pitchFamily="34" charset="0"/>
-                <a:ea typeface="Calibri" pitchFamily="34" charset="-122"/>
-                <a:cs typeface="Calibri" pitchFamily="34" charset="-120"/>
-              </a:rPr>
-              <a:t>Propose</a:t>
-            </a:r>
-            <a:endParaRPr lang="en-US" sz="1500" dirty="0"/>
-          </a:p>
-        </p:txBody>
-      </p:sp>
-      <p:sp>
-        <p:nvSpPr>
-          <p:cNvPr id="9" name="Text 6"/>
-          <p:cNvSpPr/>
-          <p:nvPr/>
-        </p:nvSpPr>
-        <p:spPr>
-          <a:xfrm>
-            <a:off x="4983480" y="2404872"/>
-            <a:ext cx="3703320" cy="502920"/>
-          </a:xfrm>
-          <a:prstGeom prst="rect">
-            <a:avLst/>
-          </a:prstGeom>
-          <a:noFill/>
-          <a:ln/>
-        </p:spPr>
-        <p:txBody>
-          <a:bodyPr wrap="square" lIns="0" tIns="0" rIns="0" bIns="0" rtlCol="0" anchor="t"/>
-          <a:lstStyle/>
-          <a:p>
-            <a:pPr indent="0" marL="0">
-              <a:buNone/>
-            </a:pPr>
-            <a:r>
-              <a:rPr lang="en-US" sz="1250" dirty="0">
-                <a:solidFill>
-                  <a:srgbClr val="5B6475"/>
-                </a:solidFill>
-                <a:latin typeface="Calibri" pitchFamily="34" charset="0"/>
-                <a:ea typeface="Calibri" pitchFamily="34" charset="-122"/>
-                <a:cs typeface="Calibri" pitchFamily="34" charset="-120"/>
-              </a:rPr>
-              <a:t>Merged workspace changes become a PR to main from propose/&lt;name&gt;, after check.sh passes.</a:t>
-            </a:r>
-            <a:endParaRPr lang="en-US" sz="1250" dirty="0"/>
-          </a:p>
-        </p:txBody>
-      </p:sp>
-      <p:sp>
-        <p:nvSpPr>
-          <p:cNvPr id="10" name="Text 7"/>
-          <p:cNvSpPr/>
-          <p:nvPr/>
-        </p:nvSpPr>
-        <p:spPr>
-          <a:xfrm>
-            <a:off x="4983480" y="3008376"/>
-            <a:ext cx="3703320" cy="274320"/>
-          </a:xfrm>
-          <a:prstGeom prst="rect">
-            <a:avLst/>
-          </a:prstGeom>
-          <a:noFill/>
-          <a:ln/>
-        </p:spPr>
-        <p:txBody>
-          <a:bodyPr wrap="square" lIns="0" tIns="0" rIns="0" bIns="0" rtlCol="0" anchor="ctr"/>
-          <a:lstStyle/>
-          <a:p>
-            <a:pPr indent="0" marL="0">
-              <a:buNone/>
-            </a:pPr>
-            <a:r>
-              <a:rPr lang="en-US" sz="1500" b="1" dirty="0">
-                <a:solidFill>
-                  <a:srgbClr val="1C2230"/>
-                </a:solidFill>
-                <a:latin typeface="Calibri" pitchFamily="34" charset="0"/>
-                <a:ea typeface="Calibri" pitchFamily="34" charset="-122"/>
-                <a:cs typeface="Calibri" pitchFamily="34" charset="-120"/>
-              </a:rPr>
-              <a:t>Histories stay joined</a:t>
-            </a:r>
-            <a:endParaRPr lang="en-US" sz="1500" dirty="0"/>
-          </a:p>
-        </p:txBody>
-      </p:sp>
-      <p:sp>
-        <p:nvSpPr>
-          <p:cNvPr id="11" name="Text 8"/>
-          <p:cNvSpPr/>
-          <p:nvPr/>
-        </p:nvSpPr>
-        <p:spPr>
-          <a:xfrm>
-            <a:off x="4983480" y="3291840"/>
-            <a:ext cx="3703320" cy="502920"/>
-          </a:xfrm>
-          <a:prstGeom prst="rect">
-            <a:avLst/>
-          </a:prstGeom>
-          <a:noFill/>
-          <a:ln/>
-        </p:spPr>
-        <p:txBody>
-          <a:bodyPr wrap="square" lIns="0" tIns="0" rIns="0" bIns="0" rtlCol="0" anchor="t"/>
-          <a:lstStyle/>
-          <a:p>
-            <a:pPr indent="0" marL="0">
-              <a:buNone/>
-            </a:pPr>
-            <a:r>
-              <a:rPr lang="en-US" sz="1250" dirty="0">
-                <a:solidFill>
-                  <a:srgbClr val="5B6475"/>
-                </a:solidFill>
-                <a:latin typeface="Calibri" pitchFamily="34" charset="0"/>
-                <a:ea typeface="Calibri" pitchFamily="34" charset="-122"/>
-                <a:cs typeface="Calibri" pitchFamily="34" charset="-120"/>
-              </a:rPr>
-              <a:t>Subtree merges, so edits on both sides meet in a normal 3-way merge.</a:t>
-            </a:r>
-            <a:endParaRPr lang="en-US" sz="1250" dirty="0"/>
-          </a:p>
-        </p:txBody>
-      </p:sp>
-      <p:sp>
-        <p:nvSpPr>
-          <p:cNvPr id="12" name="Text 9"/>
-          <p:cNvSpPr/>
-          <p:nvPr/>
-        </p:nvSpPr>
-        <p:spPr>
-          <a:xfrm>
-            <a:off x="4983480" y="3895344"/>
-            <a:ext cx="3703320" cy="274320"/>
-          </a:xfrm>
-          <a:prstGeom prst="rect">
-            <a:avLst/>
-          </a:prstGeom>
-          <a:noFill/>
-          <a:ln/>
-        </p:spPr>
-        <p:txBody>
-          <a:bodyPr wrap="square" lIns="0" tIns="0" rIns="0" bIns="0" rtlCol="0" anchor="ctr"/>
-          <a:lstStyle/>
-          <a:p>
-            <a:pPr indent="0" marL="0">
-              <a:buNone/>
-            </a:pPr>
-            <a:r>
-              <a:rPr lang="en-US" sz="1500" b="1" dirty="0">
-                <a:solidFill>
-                  <a:srgbClr val="1C2230"/>
-                </a:solidFill>
-                <a:latin typeface="Calibri" pitchFamily="34" charset="0"/>
-                <a:ea typeface="Calibri" pitchFamily="34" charset="-122"/>
-                <a:cs typeface="Calibri" pitchFamily="34" charset="-120"/>
-              </a:rPr>
-              <a:t>Conflicts are reported</a:t>
-            </a:r>
-            <a:endParaRPr lang="en-US" sz="1500" dirty="0"/>
-          </a:p>
-        </p:txBody>
-      </p:sp>
-      <p:sp>
-        <p:nvSpPr>
-          <p:cNvPr id="13" name="Text 10"/>
-          <p:cNvSpPr/>
-          <p:nvPr/>
-        </p:nvSpPr>
-        <p:spPr>
-          <a:xfrm>
-            <a:off x="4983480" y="4178808"/>
-            <a:ext cx="3703320" cy="502920"/>
-          </a:xfrm>
-          <a:prstGeom prst="rect">
-            <a:avLst/>
-          </a:prstGeom>
-          <a:noFill/>
-          <a:ln/>
-        </p:spPr>
-        <p:txBody>
-          <a:bodyPr wrap="square" lIns="0" tIns="0" rIns="0" bIns="0" rtlCol="0" anchor="t"/>
-          <a:lstStyle/>
-          <a:p>
-            <a:pPr indent="0" marL="0">
-              <a:buNone/>
-            </a:pPr>
-            <a:r>
-              <a:rPr lang="en-US" sz="1250" dirty="0">
-                <a:solidFill>
-                  <a:srgbClr val="5B6475"/>
-                </a:solidFill>
-                <a:latin typeface="Calibri" pitchFamily="34" charset="0"/>
-                <a:ea typeface="Calibri" pitchFamily="34" charset="-122"/>
-                <a:cs typeface="Calibri" pitchFamily="34" charset="-120"/>
-              </a:rPr>
-              <a:t>CI lists the files, skips that workspace, and a person resolves it.</a:t>
-            </a:r>
-            <a:endParaRPr lang="en-US" sz="1250" dirty="0"/>
+            <a:endParaRPr lang="en-US" sz="2250" dirty="0"/>
           </a:p>
         </p:txBody>
       </p:sp>
@@ -3695,26 +3093,50 @@
           <a:chExt cx="0" cy="0"/>
         </a:xfrm>
       </p:grpSpPr>
-      <p:sp>
-        <p:nvSpPr>
-          <p:cNvPr id="2" name="Shape 0"/>
+      <p:pic>
+        <p:nvPicPr>
+          <p:cNvPr id="2" name="Image 0" descr="/private/tmp/claude-501/-Users-wyattbracy-Desktop-ner-app-software-Delphi/28e5bd69-bc06-4d46-875e-7c63334f5a2a/scratchpad/build/out/pptx/07.png">    </p:cNvPr>
+          <p:cNvPicPr>
+            <a:picLocks noChangeAspect="1"/>
+          </p:cNvPicPr>
+          <p:nvPr/>
+        </p:nvPicPr>
+        <p:blipFill>
+          <a:blip r:embed="rId1"/>
+          <a:stretch>
+            <a:fillRect/>
+          </a:stretch>
+        </p:blipFill>
+        <p:spPr>
+          <a:xfrm>
+            <a:off x="0" y="0"/>
+            <a:ext cx="9144000" cy="5143500"/>
+          </a:xfrm>
+          <a:prstGeom prst="rect">
+            <a:avLst/>
+          </a:prstGeom>
+        </p:spPr>
+      </p:pic>
+      <p:sp>
+        <p:nvSpPr>
+          <p:cNvPr id="3" name="Shape 0"/>
           <p:cNvSpPr/>
           <p:nvPr/>
         </p:nvSpPr>
         <p:spPr>
           <a:xfrm>
-            <a:off x="457200" y="329184"/>
-            <a:ext cx="109728" cy="109728"/>
+            <a:off x="457200" y="331470"/>
+            <a:ext cx="85725" cy="85725"/>
           </a:xfrm>
           <a:prstGeom prst="rect">
             <a:avLst/>
           </a:prstGeom>
           <a:solidFill>
-            <a:srgbClr val="C9932E"/>
+            <a:srgbClr val="B9821F"/>
           </a:solidFill>
           <a:ln w="12700">
             <a:solidFill>
-              <a:srgbClr val="C9932E"/>
+              <a:srgbClr val="B9821F"/>
             </a:solidFill>
             <a:prstDash val="solid"/>
           </a:ln>
@@ -3722,14 +3144,14 @@
       </p:sp>
       <p:sp>
         <p:nvSpPr>
-          <p:cNvPr id="3" name="Text 1"/>
+          <p:cNvPr id="4" name="Text 1"/>
           <p:cNvSpPr/>
           <p:nvPr/>
         </p:nvSpPr>
         <p:spPr>
           <a:xfrm>
-            <a:off x="640080" y="256032"/>
-            <a:ext cx="5486400" cy="256032"/>
+            <a:off x="617220" y="297180"/>
+            <a:ext cx="6400800" cy="148590"/>
           </a:xfrm>
           <a:prstGeom prst="rect">
             <a:avLst/>
@@ -3745,30 +3167,30 @@
               <a:buNone/>
             </a:pPr>
             <a:r>
-              <a:rPr lang="en-US" sz="1100" b="1" spc="300" kern="0" dirty="0">
+              <a:rPr lang="en-US" sz="810" b="1" spc="160" kern="0" dirty="0">
                 <a:solidFill>
-                  <a:srgbClr val="C9932E"/>
+                  <a:srgbClr val="B9821F"/>
                 </a:solidFill>
-                <a:latin typeface="Calibri" pitchFamily="34" charset="0"/>
-                <a:ea typeface="Calibri" pitchFamily="34" charset="-122"/>
-                <a:cs typeface="Calibri" pitchFamily="34" charset="-120"/>
+                <a:latin typeface="Helvetica Neue" pitchFamily="34" charset="0"/>
+                <a:ea typeface="Helvetica Neue" pitchFamily="34" charset="-122"/>
+                <a:cs typeface="Helvetica Neue" pitchFamily="34" charset="-120"/>
               </a:rPr>
-              <a:t>INTERNALS  ·  2 / 3</a:t>
+              <a:t>WORKFLOW  1 / 2</a:t>
             </a:r>
-            <a:endParaRPr lang="en-US" sz="1100" dirty="0"/>
-          </a:p>
-        </p:txBody>
-      </p:sp>
-      <p:sp>
-        <p:nvSpPr>
-          <p:cNvPr id="4" name="Text 2"/>
+            <a:endParaRPr lang="en-US" sz="810" dirty="0"/>
+          </a:p>
+        </p:txBody>
+      </p:sp>
+      <p:sp>
+        <p:nvSpPr>
+          <p:cNvPr id="5" name="Text 2"/>
           <p:cNvSpPr/>
           <p:nvPr/>
         </p:nvSpPr>
         <p:spPr>
           <a:xfrm>
-            <a:off x="457200" y="512064"/>
-            <a:ext cx="8229600" cy="502920"/>
+            <a:off x="457200" y="502920"/>
+            <a:ext cx="8229600" cy="365760"/>
           </a:xfrm>
           <a:prstGeom prst="rect">
             <a:avLst/>
@@ -3777,14 +3199,16 @@
           <a:ln/>
         </p:spPr>
         <p:txBody>
-          <a:bodyPr wrap="square" lIns="0" tIns="0" rIns="0" bIns="0" rtlCol="0" anchor="ctr"/>
+          <a:bodyPr wrap="square" lIns="0" tIns="0" rIns="0" bIns="0" rtlCol="0" anchor="ctr">
+            <a:normAutofit/>
+          </a:bodyPr>
           <a:lstStyle/>
           <a:p>
             <a:pPr indent="0" marL="0">
               <a:buNone/>
             </a:pPr>
             <a:r>
-              <a:rPr lang="en-US" sz="2800" b="1" dirty="0">
+              <a:rPr lang="en-US" sz="2250" b="1" dirty="0">
                 <a:solidFill>
                   <a:srgbClr val="1C2230"/>
                 </a:solidFill>
@@ -3792,86 +3216,9 @@
                 <a:ea typeface="Georgia" pitchFamily="34" charset="-122"/>
                 <a:cs typeface="Georgia" pitchFamily="34" charset="-120"/>
               </a:rPr>
-              <a:t>setup.sh: one manifest, three checkouts</a:t>
+              <a:t>A code change: skills from Delphi, code to Argos</a:t>
             </a:r>
-            <a:endParaRPr lang="en-US" sz="2800" dirty="0"/>
-          </a:p>
-        </p:txBody>
-      </p:sp>
-      <p:pic>
-        <p:nvPicPr>
-          <p:cNvPr id="5" name="Image 0" descr="/private/tmp/claude-501/-Users-wyattbracy-Desktop-ner-app-software-Delphi/3a53aefc-b6fc-4748-b97c-ca799d718193/scratchpad/build/img/setup.png">    </p:cNvPr>
-          <p:cNvPicPr>
-            <a:picLocks noChangeAspect="1"/>
-          </p:cNvPicPr>
-          <p:nvPr/>
-        </p:nvPicPr>
-        <p:blipFill>
-          <a:blip r:embed="rId1"/>
-          <a:stretch>
-            <a:fillRect/>
-          </a:stretch>
-        </p:blipFill>
-        <p:spPr>
-          <a:xfrm>
-            <a:off x="457200" y="1188720"/>
-            <a:ext cx="8229600" cy="3017520"/>
-          </a:xfrm>
-          <a:prstGeom prst="rect">
-            <a:avLst/>
-          </a:prstGeom>
-        </p:spPr>
-      </p:pic>
-      <p:sp>
-        <p:nvSpPr>
-          <p:cNvPr id="6" name="Text 3"/>
-          <p:cNvSpPr/>
-          <p:nvPr/>
-        </p:nvSpPr>
-        <p:spPr>
-          <a:xfrm>
-            <a:off x="457200" y="4343400"/>
-            <a:ext cx="8229600" cy="457200"/>
-          </a:xfrm>
-          <a:prstGeom prst="rect">
-            <a:avLst/>
-          </a:prstGeom>
-          <a:noFill/>
-          <a:ln/>
-        </p:spPr>
-        <p:txBody>
-          <a:bodyPr wrap="square" lIns="0" tIns="0" rIns="0" bIns="0" rtlCol="0" anchor="ctr"/>
-          <a:lstStyle/>
-          <a:p>
-            <a:pPr indent="0" marL="0">
-              <a:buNone/>
-            </a:pPr>
-            <a:r>
-              <a:rPr lang="en-US" sz="1300" b="1" dirty="0">
-                <a:solidFill>
-                  <a:srgbClr val="1C2230"/>
-                </a:solidFill>
-                <a:latin typeface="Calibri" pitchFamily="34" charset="0"/>
-                <a:ea typeface="Calibri" pitchFamily="34" charset="-122"/>
-                <a:cs typeface="Calibri" pitchFamily="34" charset="-120"/>
-              </a:rPr>
-              <a:t>Code is only edited in worktrees. </a:t>
-            </a:r>
-            <a:pPr indent="0" marL="0">
-              <a:buNone/>
-            </a:pPr>
-            <a:r>
-              <a:rPr lang="en-US" sz="1300" dirty="0">
-                <a:solidFill>
-                  <a:srgbClr val="5B6475"/>
-                </a:solidFill>
-                <a:latin typeface="Calibri" pitchFamily="34" charset="0"/>
-                <a:ea typeface="Calibri" pitchFamily="34" charset="-122"/>
-                <a:cs typeface="Calibri" pitchFamily="34" charset="-120"/>
-              </a:rPr>
-              <a:t>Everything setup makes is git-ignored, so it never shows up as a workspace change. Runs on macOS bash 3.2 and Git Bash.</a:t>
-            </a:r>
-            <a:endParaRPr lang="en-US" sz="1300" dirty="0"/>
+            <a:endParaRPr lang="en-US" sz="2250" dirty="0"/>
           </a:p>
         </p:txBody>
       </p:sp>
@@ -3907,26 +3254,50 @@
           <a:chExt cx="0" cy="0"/>
         </a:xfrm>
       </p:grpSpPr>
-      <p:sp>
-        <p:nvSpPr>
-          <p:cNvPr id="2" name="Shape 0"/>
+      <p:pic>
+        <p:nvPicPr>
+          <p:cNvPr id="2" name="Image 0" descr="/private/tmp/claude-501/-Users-wyattbracy-Desktop-ner-app-software-Delphi/28e5bd69-bc06-4d46-875e-7c63334f5a2a/scratchpad/build/out/pptx/08.png">    </p:cNvPr>
+          <p:cNvPicPr>
+            <a:picLocks noChangeAspect="1"/>
+          </p:cNvPicPr>
+          <p:nvPr/>
+        </p:nvPicPr>
+        <p:blipFill>
+          <a:blip r:embed="rId1"/>
+          <a:stretch>
+            <a:fillRect/>
+          </a:stretch>
+        </p:blipFill>
+        <p:spPr>
+          <a:xfrm>
+            <a:off x="0" y="0"/>
+            <a:ext cx="9144000" cy="5143500"/>
+          </a:xfrm>
+          <a:prstGeom prst="rect">
+            <a:avLst/>
+          </a:prstGeom>
+        </p:spPr>
+      </p:pic>
+      <p:sp>
+        <p:nvSpPr>
+          <p:cNvPr id="3" name="Shape 0"/>
           <p:cNvSpPr/>
           <p:nvPr/>
         </p:nvSpPr>
         <p:spPr>
           <a:xfrm>
-            <a:off x="457200" y="329184"/>
-            <a:ext cx="109728" cy="109728"/>
+            <a:off x="457200" y="331470"/>
+            <a:ext cx="85725" cy="85725"/>
           </a:xfrm>
           <a:prstGeom prst="rect">
             <a:avLst/>
           </a:prstGeom>
           <a:solidFill>
-            <a:srgbClr val="C9932E"/>
+            <a:srgbClr val="B9821F"/>
           </a:solidFill>
           <a:ln w="12700">
             <a:solidFill>
-              <a:srgbClr val="C9932E"/>
+              <a:srgbClr val="B9821F"/>
             </a:solidFill>
             <a:prstDash val="solid"/>
           </a:ln>
@@ -3934,14 +3305,14 @@
       </p:sp>
       <p:sp>
         <p:nvSpPr>
-          <p:cNvPr id="3" name="Text 1"/>
+          <p:cNvPr id="4" name="Text 1"/>
           <p:cNvSpPr/>
           <p:nvPr/>
         </p:nvSpPr>
         <p:spPr>
           <a:xfrm>
-            <a:off x="640080" y="256032"/>
-            <a:ext cx="5486400" cy="256032"/>
+            <a:off x="617220" y="297180"/>
+            <a:ext cx="6400800" cy="148590"/>
           </a:xfrm>
           <a:prstGeom prst="rect">
             <a:avLst/>
@@ -3957,30 +3328,30 @@
               <a:buNone/>
             </a:pPr>
             <a:r>
-              <a:rPr lang="en-US" sz="1100" b="1" spc="300" kern="0" dirty="0">
+              <a:rPr lang="en-US" sz="810" b="1" spc="160" kern="0" dirty="0">
                 <a:solidFill>
-                  <a:srgbClr val="C9932E"/>
+                  <a:srgbClr val="B9821F"/>
                 </a:solidFill>
-                <a:latin typeface="Calibri" pitchFamily="34" charset="0"/>
-                <a:ea typeface="Calibri" pitchFamily="34" charset="-122"/>
-                <a:cs typeface="Calibri" pitchFamily="34" charset="-120"/>
+                <a:latin typeface="Helvetica Neue" pitchFamily="34" charset="0"/>
+                <a:ea typeface="Helvetica Neue" pitchFamily="34" charset="-122"/>
+                <a:cs typeface="Helvetica Neue" pitchFamily="34" charset="-120"/>
               </a:rPr>
-              <a:t>INTERNALS  ·  3 / 3</a:t>
+              <a:t>WORKFLOW  2 / 2</a:t>
             </a:r>
-            <a:endParaRPr lang="en-US" sz="1100" dirty="0"/>
-          </a:p>
-        </p:txBody>
-      </p:sp>
-      <p:sp>
-        <p:nvSpPr>
-          <p:cNvPr id="4" name="Text 2"/>
+            <a:endParaRPr lang="en-US" sz="810" dirty="0"/>
+          </a:p>
+        </p:txBody>
+      </p:sp>
+      <p:sp>
+        <p:nvSpPr>
+          <p:cNvPr id="5" name="Text 2"/>
           <p:cNvSpPr/>
           <p:nvPr/>
         </p:nvSpPr>
         <p:spPr>
           <a:xfrm>
-            <a:off x="457200" y="512064"/>
-            <a:ext cx="8229600" cy="502920"/>
+            <a:off x="457200" y="502920"/>
+            <a:ext cx="8229600" cy="365760"/>
           </a:xfrm>
           <a:prstGeom prst="rect">
             <a:avLst/>
@@ -3989,14 +3360,16 @@
           <a:ln/>
         </p:spPr>
         <p:txBody>
-          <a:bodyPr wrap="square" lIns="0" tIns="0" rIns="0" bIns="0" rtlCol="0" anchor="ctr"/>
+          <a:bodyPr wrap="square" lIns="0" tIns="0" rIns="0" bIns="0" rtlCol="0" anchor="ctr">
+            <a:normAutofit/>
+          </a:bodyPr>
           <a:lstStyle/>
           <a:p>
             <a:pPr indent="0" marL="0">
               <a:buNone/>
             </a:pPr>
             <a:r>
-              <a:rPr lang="en-US" sz="2800" b="1" dirty="0">
+              <a:rPr lang="en-US" sz="2250" b="1" dirty="0">
                 <a:solidFill>
                   <a:srgbClr val="1C2230"/>
                 </a:solidFill>
@@ -4004,545 +3377,9 @@
                 <a:ea typeface="Georgia" pitchFamily="34" charset="-122"/>
                 <a:cs typeface="Georgia" pitchFamily="34" charset="-120"/>
               </a:rPr>
-              <a:t>New workspaces, and keeping it all valid</a:t>
+              <a:t>A context change: fix it once, every clone gets it</a:t>
             </a:r>
-            <a:endParaRPr lang="en-US" sz="2800" dirty="0"/>
-          </a:p>
-        </p:txBody>
-      </p:sp>
-      <p:pic>
-        <p:nvPicPr>
-          <p:cNvPr id="5" name="Image 0" descr="/private/tmp/claude-501/-Users-wyattbracy-Desktop-ner-app-software-Delphi/3a53aefc-b6fc-4748-b97c-ca799d718193/scratchpad/build/img/lifecycle.png">    </p:cNvPr>
-          <p:cNvPicPr>
-            <a:picLocks noChangeAspect="1"/>
-          </p:cNvPicPr>
-          <p:nvPr/>
-        </p:nvPicPr>
-        <p:blipFill>
-          <a:blip r:embed="rId1"/>
-          <a:stretch>
-            <a:fillRect/>
-          </a:stretch>
-        </p:blipFill>
-        <p:spPr>
-          <a:xfrm>
-            <a:off x="401595" y="1188720"/>
-            <a:ext cx="8340811" cy="1112108"/>
-          </a:xfrm>
-          <a:prstGeom prst="rect">
-            <a:avLst/>
-          </a:prstGeom>
-        </p:spPr>
-      </p:pic>
-      <p:sp>
-        <p:nvSpPr>
-          <p:cNvPr id="6" name="Shape 3"/>
-          <p:cNvSpPr/>
-          <p:nvPr/>
-        </p:nvSpPr>
-        <p:spPr>
-          <a:xfrm>
-            <a:off x="457200" y="2560320"/>
-            <a:ext cx="1851660" cy="1600200"/>
-          </a:xfrm>
-          <a:prstGeom prst="rect">
-            <a:avLst/>
-          </a:prstGeom>
-          <a:solidFill>
-            <a:srgbClr val="FFFFFF"/>
-          </a:solidFill>
-          <a:ln w="12700">
-            <a:solidFill>
-              <a:srgbClr val="CFC7B8"/>
-            </a:solidFill>
-            <a:prstDash val="solid"/>
-          </a:ln>
-        </p:spPr>
-      </p:sp>
-      <p:sp>
-        <p:nvSpPr>
-          <p:cNvPr id="7" name="Shape 4"/>
-          <p:cNvSpPr/>
-          <p:nvPr/>
-        </p:nvSpPr>
-        <p:spPr>
-          <a:xfrm>
-            <a:off x="457200" y="2560320"/>
-            <a:ext cx="1851660" cy="64008"/>
-          </a:xfrm>
-          <a:prstGeom prst="rect">
-            <a:avLst/>
-          </a:prstGeom>
-          <a:solidFill>
-            <a:srgbClr val="2F6F73"/>
-          </a:solidFill>
-          <a:ln w="12700">
-            <a:solidFill>
-              <a:srgbClr val="2F6F73"/>
-            </a:solidFill>
-            <a:prstDash val="solid"/>
-          </a:ln>
-        </p:spPr>
-      </p:sp>
-      <p:sp>
-        <p:nvSpPr>
-          <p:cNvPr id="8" name="Text 5"/>
-          <p:cNvSpPr/>
-          <p:nvPr/>
-        </p:nvSpPr>
-        <p:spPr>
-          <a:xfrm>
-            <a:off x="621792" y="2788920"/>
-            <a:ext cx="1522476" cy="320040"/>
-          </a:xfrm>
-          <a:prstGeom prst="rect">
-            <a:avLst/>
-          </a:prstGeom>
-          <a:noFill/>
-          <a:ln/>
-        </p:spPr>
-        <p:txBody>
-          <a:bodyPr wrap="square" lIns="0" tIns="0" rIns="0" bIns="0" rtlCol="0" anchor="ctr"/>
-          <a:lstStyle/>
-          <a:p>
-            <a:pPr indent="0" marL="0">
-              <a:buNone/>
-            </a:pPr>
-            <a:r>
-              <a:rPr lang="en-US" sz="1500" b="1" dirty="0">
-                <a:solidFill>
-                  <a:srgbClr val="1C2230"/>
-                </a:solidFill>
-                <a:latin typeface="Calibri" pitchFamily="34" charset="0"/>
-                <a:ea typeface="Calibri" pitchFamily="34" charset="-122"/>
-                <a:cs typeface="Calibri" pitchFamily="34" charset="-120"/>
-              </a:rPr>
-              <a:t>PRs only</a:t>
-            </a:r>
-            <a:endParaRPr lang="en-US" sz="1500" dirty="0"/>
-          </a:p>
-        </p:txBody>
-      </p:sp>
-      <p:sp>
-        <p:nvSpPr>
-          <p:cNvPr id="9" name="Text 6"/>
-          <p:cNvSpPr/>
-          <p:nvPr/>
-        </p:nvSpPr>
-        <p:spPr>
-          <a:xfrm>
-            <a:off x="621792" y="3163824"/>
-            <a:ext cx="1522476" cy="1051560"/>
-          </a:xfrm>
-          <a:prstGeom prst="rect">
-            <a:avLst/>
-          </a:prstGeom>
-          <a:noFill/>
-          <a:ln/>
-        </p:spPr>
-        <p:txBody>
-          <a:bodyPr wrap="square" lIns="0" tIns="0" rIns="0" bIns="0" rtlCol="0" anchor="t"/>
-          <a:lstStyle/>
-          <a:p>
-            <a:pPr indent="0" marL="0">
-              <a:buNone/>
-            </a:pPr>
-            <a:r>
-              <a:rPr lang="en-US" sz="1250" dirty="0">
-                <a:solidFill>
-                  <a:srgbClr val="5B6475"/>
-                </a:solidFill>
-                <a:latin typeface="Calibri" pitchFamily="34" charset="0"/>
-                <a:ea typeface="Calibri" pitchFamily="34" charset="-122"/>
-                <a:cs typeface="Calibri" pitchFamily="34" charset="-120"/>
-              </a:rPr>
-              <a:t>Nobody pushes to main or ws/* directly, except CI's own sync.</a:t>
-            </a:r>
-            <a:endParaRPr lang="en-US" sz="1250" dirty="0"/>
-          </a:p>
-        </p:txBody>
-      </p:sp>
-      <p:sp>
-        <p:nvSpPr>
-          <p:cNvPr id="10" name="Shape 7"/>
-          <p:cNvSpPr/>
-          <p:nvPr/>
-        </p:nvSpPr>
-        <p:spPr>
-          <a:xfrm>
-            <a:off x="2583180" y="2560320"/>
-            <a:ext cx="1851660" cy="1600200"/>
-          </a:xfrm>
-          <a:prstGeom prst="rect">
-            <a:avLst/>
-          </a:prstGeom>
-          <a:solidFill>
-            <a:srgbClr val="FFFFFF"/>
-          </a:solidFill>
-          <a:ln w="12700">
-            <a:solidFill>
-              <a:srgbClr val="CFC7B8"/>
-            </a:solidFill>
-            <a:prstDash val="solid"/>
-          </a:ln>
-        </p:spPr>
-      </p:sp>
-      <p:sp>
-        <p:nvSpPr>
-          <p:cNvPr id="11" name="Shape 8"/>
-          <p:cNvSpPr/>
-          <p:nvPr/>
-        </p:nvSpPr>
-        <p:spPr>
-          <a:xfrm>
-            <a:off x="2583180" y="2560320"/>
-            <a:ext cx="1851660" cy="64008"/>
-          </a:xfrm>
-          <a:prstGeom prst="rect">
-            <a:avLst/>
-          </a:prstGeom>
-          <a:solidFill>
-            <a:srgbClr val="C9932E"/>
-          </a:solidFill>
-          <a:ln w="12700">
-            <a:solidFill>
-              <a:srgbClr val="C9932E"/>
-            </a:solidFill>
-            <a:prstDash val="solid"/>
-          </a:ln>
-        </p:spPr>
-      </p:sp>
-      <p:sp>
-        <p:nvSpPr>
-          <p:cNvPr id="12" name="Text 9"/>
-          <p:cNvSpPr/>
-          <p:nvPr/>
-        </p:nvSpPr>
-        <p:spPr>
-          <a:xfrm>
-            <a:off x="2747772" y="2788920"/>
-            <a:ext cx="1522476" cy="320040"/>
-          </a:xfrm>
-          <a:prstGeom prst="rect">
-            <a:avLst/>
-          </a:prstGeom>
-          <a:noFill/>
-          <a:ln/>
-        </p:spPr>
-        <p:txBody>
-          <a:bodyPr wrap="square" lIns="0" tIns="0" rIns="0" bIns="0" rtlCol="0" anchor="ctr"/>
-          <a:lstStyle/>
-          <a:p>
-            <a:pPr indent="0" marL="0">
-              <a:buNone/>
-            </a:pPr>
-            <a:r>
-              <a:rPr lang="en-US" sz="1500" b="1" dirty="0">
-                <a:solidFill>
-                  <a:srgbClr val="1C2230"/>
-                </a:solidFill>
-                <a:latin typeface="Calibri" pitchFamily="34" charset="0"/>
-                <a:ea typeface="Calibri" pitchFamily="34" charset="-122"/>
-                <a:cs typeface="Calibri" pitchFamily="34" charset="-120"/>
-              </a:rPr>
-              <a:t>check.sh</a:t>
-            </a:r>
-            <a:endParaRPr lang="en-US" sz="1500" dirty="0"/>
-          </a:p>
-        </p:txBody>
-      </p:sp>
-      <p:sp>
-        <p:nvSpPr>
-          <p:cNvPr id="13" name="Text 10"/>
-          <p:cNvSpPr/>
-          <p:nvPr/>
-        </p:nvSpPr>
-        <p:spPr>
-          <a:xfrm>
-            <a:off x="2747772" y="3163824"/>
-            <a:ext cx="1522476" cy="1051560"/>
-          </a:xfrm>
-          <a:prstGeom prst="rect">
-            <a:avLst/>
-          </a:prstGeom>
-          <a:noFill/>
-          <a:ln/>
-        </p:spPr>
-        <p:txBody>
-          <a:bodyPr wrap="square" lIns="0" tIns="0" rIns="0" bIns="0" rtlCol="0" anchor="t"/>
-          <a:lstStyle/>
-          <a:p>
-            <a:pPr indent="0" marL="0">
-              <a:buNone/>
-            </a:pPr>
-            <a:r>
-              <a:rPr lang="en-US" sz="1250" dirty="0">
-                <a:solidFill>
-                  <a:srgbClr val="5B6475"/>
-                </a:solidFill>
-                <a:latin typeface="Calibri" pitchFamily="34" charset="0"/>
-                <a:ea typeface="Calibri" pitchFamily="34" charset="-122"/>
-                <a:cs typeface="Calibri" pitchFamily="34" charset="-120"/>
-              </a:rPr>
-              <a:t>Validates manifests and names, and that managed scripts match the template.</a:t>
-            </a:r>
-            <a:endParaRPr lang="en-US" sz="1250" dirty="0"/>
-          </a:p>
-        </p:txBody>
-      </p:sp>
-      <p:sp>
-        <p:nvSpPr>
-          <p:cNvPr id="14" name="Shape 11"/>
-          <p:cNvSpPr/>
-          <p:nvPr/>
-        </p:nvSpPr>
-        <p:spPr>
-          <a:xfrm>
-            <a:off x="4709160" y="2560320"/>
-            <a:ext cx="1851660" cy="1600200"/>
-          </a:xfrm>
-          <a:prstGeom prst="rect">
-            <a:avLst/>
-          </a:prstGeom>
-          <a:solidFill>
-            <a:srgbClr val="FFFFFF"/>
-          </a:solidFill>
-          <a:ln w="12700">
-            <a:solidFill>
-              <a:srgbClr val="CFC7B8"/>
-            </a:solidFill>
-            <a:prstDash val="solid"/>
-          </a:ln>
-        </p:spPr>
-      </p:sp>
-      <p:sp>
-        <p:nvSpPr>
-          <p:cNvPr id="15" name="Shape 12"/>
-          <p:cNvSpPr/>
-          <p:nvPr/>
-        </p:nvSpPr>
-        <p:spPr>
-          <a:xfrm>
-            <a:off x="4709160" y="2560320"/>
-            <a:ext cx="1851660" cy="64008"/>
-          </a:xfrm>
-          <a:prstGeom prst="rect">
-            <a:avLst/>
-          </a:prstGeom>
-          <a:solidFill>
-            <a:srgbClr val="2F6F73"/>
-          </a:solidFill>
-          <a:ln w="12700">
-            <a:solidFill>
-              <a:srgbClr val="2F6F73"/>
-            </a:solidFill>
-            <a:prstDash val="solid"/>
-          </a:ln>
-        </p:spPr>
-      </p:sp>
-      <p:sp>
-        <p:nvSpPr>
-          <p:cNvPr id="16" name="Text 13"/>
-          <p:cNvSpPr/>
-          <p:nvPr/>
-        </p:nvSpPr>
-        <p:spPr>
-          <a:xfrm>
-            <a:off x="4873752" y="2788920"/>
-            <a:ext cx="1522476" cy="320040"/>
-          </a:xfrm>
-          <a:prstGeom prst="rect">
-            <a:avLst/>
-          </a:prstGeom>
-          <a:noFill/>
-          <a:ln/>
-        </p:spPr>
-        <p:txBody>
-          <a:bodyPr wrap="square" lIns="0" tIns="0" rIns="0" bIns="0" rtlCol="0" anchor="ctr"/>
-          <a:lstStyle/>
-          <a:p>
-            <a:pPr indent="0" marL="0">
-              <a:buNone/>
-            </a:pPr>
-            <a:r>
-              <a:rPr lang="en-US" sz="1500" b="1" dirty="0">
-                <a:solidFill>
-                  <a:srgbClr val="1C2230"/>
-                </a:solidFill>
-                <a:latin typeface="Calibri" pitchFamily="34" charset="0"/>
-                <a:ea typeface="Calibri" pitchFamily="34" charset="-122"/>
-                <a:cs typeface="Calibri" pitchFamily="34" charset="-120"/>
-              </a:rPr>
-              <a:t>No CLI to install</a:t>
-            </a:r>
-            <a:endParaRPr lang="en-US" sz="1500" dirty="0"/>
-          </a:p>
-        </p:txBody>
-      </p:sp>
-      <p:sp>
-        <p:nvSpPr>
-          <p:cNvPr id="17" name="Text 14"/>
-          <p:cNvSpPr/>
-          <p:nvPr/>
-        </p:nvSpPr>
-        <p:spPr>
-          <a:xfrm>
-            <a:off x="4873752" y="3163824"/>
-            <a:ext cx="1522476" cy="1051560"/>
-          </a:xfrm>
-          <a:prstGeom prst="rect">
-            <a:avLst/>
-          </a:prstGeom>
-          <a:noFill/>
-          <a:ln/>
-        </p:spPr>
-        <p:txBody>
-          <a:bodyPr wrap="square" lIns="0" tIns="0" rIns="0" bIns="0" rtlCol="0" anchor="t"/>
-          <a:lstStyle/>
-          <a:p>
-            <a:pPr indent="0" marL="0">
-              <a:buNone/>
-            </a:pPr>
-            <a:r>
-              <a:rPr lang="en-US" sz="1250" dirty="0">
-                <a:solidFill>
-                  <a:srgbClr val="5B6475"/>
-                </a:solidFill>
-                <a:latin typeface="Calibri" pitchFamily="34" charset="0"/>
-                <a:ea typeface="Calibri" pitchFamily="34" charset="-122"/>
-                <a:cs typeface="Calibri" pitchFamily="34" charset="-120"/>
-              </a:rPr>
-              <a:t>git, gh, and a few short shell scripts. That's the whole runtime.</a:t>
-            </a:r>
-            <a:endParaRPr lang="en-US" sz="1250" dirty="0"/>
-          </a:p>
-        </p:txBody>
-      </p:sp>
-      <p:sp>
-        <p:nvSpPr>
-          <p:cNvPr id="18" name="Shape 15"/>
-          <p:cNvSpPr/>
-          <p:nvPr/>
-        </p:nvSpPr>
-        <p:spPr>
-          <a:xfrm>
-            <a:off x="6835140" y="2560320"/>
-            <a:ext cx="1851660" cy="1600200"/>
-          </a:xfrm>
-          <a:prstGeom prst="rect">
-            <a:avLst/>
-          </a:prstGeom>
-          <a:solidFill>
-            <a:srgbClr val="FFFFFF"/>
-          </a:solidFill>
-          <a:ln w="12700">
-            <a:solidFill>
-              <a:srgbClr val="CFC7B8"/>
-            </a:solidFill>
-            <a:prstDash val="solid"/>
-          </a:ln>
-        </p:spPr>
-      </p:sp>
-      <p:sp>
-        <p:nvSpPr>
-          <p:cNvPr id="19" name="Shape 16"/>
-          <p:cNvSpPr/>
-          <p:nvPr/>
-        </p:nvSpPr>
-        <p:spPr>
-          <a:xfrm>
-            <a:off x="6835140" y="2560320"/>
-            <a:ext cx="1851660" cy="64008"/>
-          </a:xfrm>
-          <a:prstGeom prst="rect">
-            <a:avLst/>
-          </a:prstGeom>
-          <a:solidFill>
-            <a:srgbClr val="2F6F73"/>
-          </a:solidFill>
-          <a:ln w="12700">
-            <a:solidFill>
-              <a:srgbClr val="2F6F73"/>
-            </a:solidFill>
-            <a:prstDash val="solid"/>
-          </a:ln>
-        </p:spPr>
-      </p:sp>
-      <p:sp>
-        <p:nvSpPr>
-          <p:cNvPr id="20" name="Text 17"/>
-          <p:cNvSpPr/>
-          <p:nvPr/>
-        </p:nvSpPr>
-        <p:spPr>
-          <a:xfrm>
-            <a:off x="6999732" y="2788920"/>
-            <a:ext cx="1522476" cy="320040"/>
-          </a:xfrm>
-          <a:prstGeom prst="rect">
-            <a:avLst/>
-          </a:prstGeom>
-          <a:noFill/>
-          <a:ln/>
-        </p:spPr>
-        <p:txBody>
-          <a:bodyPr wrap="square" lIns="0" tIns="0" rIns="0" bIns="0" rtlCol="0" anchor="ctr"/>
-          <a:lstStyle/>
-          <a:p>
-            <a:pPr indent="0" marL="0">
-              <a:buNone/>
-            </a:pPr>
-            <a:r>
-              <a:rPr lang="en-US" sz="1500" b="1" dirty="0">
-                <a:solidFill>
-                  <a:srgbClr val="1C2230"/>
-                </a:solidFill>
-                <a:latin typeface="Calibri" pitchFamily="34" charset="0"/>
-                <a:ea typeface="Calibri" pitchFamily="34" charset="-122"/>
-                <a:cs typeface="Calibri" pitchFamily="34" charset="-120"/>
-              </a:rPr>
-              <a:t>Sandbox-tested</a:t>
-            </a:r>
-            <a:endParaRPr lang="en-US" sz="1500" dirty="0"/>
-          </a:p>
-        </p:txBody>
-      </p:sp>
-      <p:sp>
-        <p:nvSpPr>
-          <p:cNvPr id="21" name="Text 18"/>
-          <p:cNvSpPr/>
-          <p:nvPr/>
-        </p:nvSpPr>
-        <p:spPr>
-          <a:xfrm>
-            <a:off x="6999732" y="3163824"/>
-            <a:ext cx="1522476" cy="1051560"/>
-          </a:xfrm>
-          <a:prstGeom prst="rect">
-            <a:avLst/>
-          </a:prstGeom>
-          <a:noFill/>
-          <a:ln/>
-        </p:spPr>
-        <p:txBody>
-          <a:bodyPr wrap="square" lIns="0" tIns="0" rIns="0" bIns="0" rtlCol="0" anchor="t"/>
-          <a:lstStyle/>
-          <a:p>
-            <a:pPr indent="0" marL="0">
-              <a:buNone/>
-            </a:pPr>
-            <a:r>
-              <a:rPr lang="en-US" sz="1250" dirty="0">
-                <a:solidFill>
-                  <a:srgbClr val="5B6475"/>
-                </a:solidFill>
-                <a:latin typeface="Calibri" pitchFamily="34" charset="0"/>
-                <a:ea typeface="Calibri" pitchFamily="34" charset="-122"/>
-                <a:cs typeface="Calibri" pitchFamily="34" charset="-120"/>
-              </a:rPr>
-              <a:t>tests/e2e.sh drives every flow against a local bare origin and stub gh.</a:t>
-            </a:r>
-            <a:endParaRPr lang="en-US" sz="1250" dirty="0"/>
+            <a:endParaRPr lang="en-US" sz="2250" dirty="0"/>
           </a:p>
         </p:txBody>
       </p:sp>
@@ -4560,7 +3397,7 @@
     <p:bg>
       <p:bgPr>
         <a:solidFill>
-          <a:srgbClr val="1C2230"/>
+          <a:srgbClr val="F7F4EE"/>
         </a:solidFill>
       </p:bgPr>
     </p:bg>
@@ -4578,26 +3415,50 @@
           <a:chExt cx="0" cy="0"/>
         </a:xfrm>
       </p:grpSpPr>
-      <p:sp>
-        <p:nvSpPr>
-          <p:cNvPr id="2" name="Shape 0"/>
+      <p:pic>
+        <p:nvPicPr>
+          <p:cNvPr id="2" name="Image 0" descr="/private/tmp/claude-501/-Users-wyattbracy-Desktop-ner-app-software-Delphi/28e5bd69-bc06-4d46-875e-7c63334f5a2a/scratchpad/build/out/pptx/09.png">    </p:cNvPr>
+          <p:cNvPicPr>
+            <a:picLocks noChangeAspect="1"/>
+          </p:cNvPicPr>
+          <p:nvPr/>
+        </p:nvPicPr>
+        <p:blipFill>
+          <a:blip r:embed="rId1"/>
+          <a:stretch>
+            <a:fillRect/>
+          </a:stretch>
+        </p:blipFill>
+        <p:spPr>
+          <a:xfrm>
+            <a:off x="0" y="0"/>
+            <a:ext cx="9144000" cy="5143500"/>
+          </a:xfrm>
+          <a:prstGeom prst="rect">
+            <a:avLst/>
+          </a:prstGeom>
+        </p:spPr>
+      </p:pic>
+      <p:sp>
+        <p:nvSpPr>
+          <p:cNvPr id="3" name="Shape 0"/>
           <p:cNvSpPr/>
           <p:nvPr/>
         </p:nvSpPr>
         <p:spPr>
           <a:xfrm>
-            <a:off x="548640" y="969264"/>
-            <a:ext cx="146304" cy="146304"/>
+            <a:off x="457200" y="331470"/>
+            <a:ext cx="85725" cy="85725"/>
           </a:xfrm>
           <a:prstGeom prst="rect">
             <a:avLst/>
           </a:prstGeom>
           <a:solidFill>
-            <a:srgbClr val="C9932E"/>
+            <a:srgbClr val="B9821F"/>
           </a:solidFill>
           <a:ln w="12700">
             <a:solidFill>
-              <a:srgbClr val="C9932E"/>
+              <a:srgbClr val="B9821F"/>
             </a:solidFill>
             <a:prstDash val="solid"/>
           </a:ln>
@@ -4605,14 +3466,14 @@
       </p:sp>
       <p:sp>
         <p:nvSpPr>
-          <p:cNvPr id="3" name="Text 1"/>
+          <p:cNvPr id="4" name="Text 1"/>
           <p:cNvSpPr/>
           <p:nvPr/>
         </p:nvSpPr>
         <p:spPr>
           <a:xfrm>
-            <a:off x="822960" y="896112"/>
-            <a:ext cx="5486400" cy="292608"/>
+            <a:off x="617220" y="297180"/>
+            <a:ext cx="6400800" cy="148590"/>
           </a:xfrm>
           <a:prstGeom prst="rect">
             <a:avLst/>
@@ -4628,30 +3489,30 @@
               <a:buNone/>
             </a:pPr>
             <a:r>
-              <a:rPr lang="en-US" sz="1300" b="1" spc="400" kern="0" dirty="0">
+              <a:rPr lang="en-US" sz="810" b="1" spc="160" kern="0" dirty="0">
                 <a:solidFill>
-                  <a:srgbClr val="C9932E"/>
+                  <a:srgbClr val="B9821F"/>
                 </a:solidFill>
-                <a:latin typeface="Calibri" pitchFamily="34" charset="0"/>
-                <a:ea typeface="Calibri" pitchFamily="34" charset="-122"/>
-                <a:cs typeface="Calibri" pitchFamily="34" charset="-120"/>
+                <a:latin typeface="Helvetica Neue" pitchFamily="34" charset="0"/>
+                <a:ea typeface="Helvetica Neue" pitchFamily="34" charset="-122"/>
+                <a:cs typeface="Helvetica Neue" pitchFamily="34" charset="-120"/>
               </a:rPr>
-              <a:t>TRY IT</a:t>
+              <a:t>UNDER THE HOOD</a:t>
             </a:r>
-            <a:endParaRPr lang="en-US" sz="1300" dirty="0"/>
-          </a:p>
-        </p:txBody>
-      </p:sp>
-      <p:sp>
-        <p:nvSpPr>
-          <p:cNvPr id="4" name="Text 2"/>
+            <a:endParaRPr lang="en-US" sz="810" dirty="0"/>
+          </a:p>
+        </p:txBody>
+      </p:sp>
+      <p:sp>
+        <p:nvSpPr>
+          <p:cNvPr id="5" name="Text 2"/>
           <p:cNvSpPr/>
           <p:nvPr/>
         </p:nvSpPr>
         <p:spPr>
           <a:xfrm>
-            <a:off x="548640" y="1280160"/>
-            <a:ext cx="8046720" cy="640080"/>
+            <a:off x="457200" y="502920"/>
+            <a:ext cx="8229600" cy="365760"/>
           </a:xfrm>
           <a:prstGeom prst="rect">
             <a:avLst/>
@@ -4660,207 +3521,26 @@
           <a:ln/>
         </p:spPr>
         <p:txBody>
-          <a:bodyPr wrap="square" lIns="0" tIns="0" rIns="0" bIns="0" rtlCol="0" anchor="ctr"/>
+          <a:bodyPr wrap="square" lIns="0" tIns="0" rIns="0" bIns="0" rtlCol="0" anchor="ctr">
+            <a:normAutofit/>
+          </a:bodyPr>
           <a:lstStyle/>
           <a:p>
             <a:pPr indent="0" marL="0">
               <a:buNone/>
             </a:pPr>
             <a:r>
-              <a:rPr lang="en-US" sz="3200" b="1" dirty="0">
+              <a:rPr lang="en-US" sz="2250" b="1" dirty="0">
                 <a:solidFill>
-                  <a:srgbClr val="FFFFFF"/>
+                  <a:srgbClr val="1C2230"/>
                 </a:solidFill>
                 <a:latin typeface="Georgia" pitchFamily="34" charset="0"/>
                 <a:ea typeface="Georgia" pitchFamily="34" charset="-122"/>
                 <a:cs typeface="Georgia" pitchFamily="34" charset="-120"/>
               </a:rPr>
-              <a:t>Three commands to a ready agent</a:t>
+              <a:t>Two CI merges keep the folder and the branch in step</a:t>
             </a:r>
-            <a:endParaRPr lang="en-US" sz="3200" dirty="0"/>
-          </a:p>
-        </p:txBody>
-      </p:sp>
-      <p:sp>
-        <p:nvSpPr>
-          <p:cNvPr id="5" name="Shape 3"/>
-          <p:cNvSpPr/>
-          <p:nvPr/>
-        </p:nvSpPr>
-        <p:spPr>
-          <a:xfrm>
-            <a:off x="548640" y="2194560"/>
-            <a:ext cx="8046720" cy="1600200"/>
-          </a:xfrm>
-          <a:prstGeom prst="rect">
-            <a:avLst/>
-          </a:prstGeom>
-          <a:solidFill>
-            <a:srgbClr val="2C3448"/>
-          </a:solidFill>
-          <a:ln w="12700">
-            <a:solidFill>
-              <a:srgbClr val="48526A"/>
-            </a:solidFill>
-            <a:prstDash val="solid"/>
-          </a:ln>
-        </p:spPr>
-      </p:sp>
-      <p:sp>
-        <p:nvSpPr>
-          <p:cNvPr id="6" name="Text 4"/>
-          <p:cNvSpPr/>
-          <p:nvPr/>
-        </p:nvSpPr>
-        <p:spPr>
-          <a:xfrm>
-            <a:off x="777240" y="2286000"/>
-            <a:ext cx="7726680" cy="1417320"/>
-          </a:xfrm>
-          <a:prstGeom prst="rect">
-            <a:avLst/>
-          </a:prstGeom>
-          <a:noFill/>
-          <a:ln/>
-        </p:spPr>
-        <p:txBody>
-          <a:bodyPr wrap="square" lIns="0" tIns="0" rIns="0" bIns="0" rtlCol="0" anchor="ctr"/>
-          <a:lstStyle/>
-          <a:p>
-            <a:pPr indent="0" marL="0">
-              <a:spcAft>
-                <a:spcPts val="400"/>
-              </a:spcAft>
-              <a:buNone/>
-            </a:pPr>
-            <a:r>
-              <a:rPr lang="en-US" sz="1300" dirty="0">
-                <a:solidFill>
-                  <a:srgbClr val="FFFFFF"/>
-                </a:solidFill>
-                <a:latin typeface="Consolas" pitchFamily="34" charset="0"/>
-                <a:ea typeface="Consolas" pitchFamily="34" charset="-122"/>
-                <a:cs typeface="Consolas" pitchFamily="34" charset="-120"/>
-              </a:rPr>
-              <a:t>git clone -b ws/argos-dev \</a:t>
-            </a:r>
-            <a:endParaRPr lang="en-US" sz="1300" dirty="0"/>
-          </a:p>
-          <a:p>
-            <a:pPr indent="0" marL="0">
-              <a:spcAft>
-                <a:spcPts val="400"/>
-              </a:spcAft>
-              <a:buNone/>
-            </a:pPr>
-            <a:r>
-              <a:rPr lang="en-US" sz="1300" dirty="0">
-                <a:solidFill>
-                  <a:srgbClr val="FFFFFF"/>
-                </a:solidFill>
-                <a:latin typeface="Consolas" pitchFamily="34" charset="0"/>
-                <a:ea typeface="Consolas" pitchFamily="34" charset="-122"/>
-                <a:cs typeface="Consolas" pitchFamily="34" charset="-120"/>
-              </a:rPr>
-              <a:t>  https://github.com/Northeastern-Electric-Racing/Delphi.git argos-dev</a:t>
-            </a:r>
-            <a:endParaRPr lang="en-US" sz="1300" dirty="0"/>
-          </a:p>
-          <a:p>
-            <a:pPr indent="0" marL="0">
-              <a:spcAft>
-                <a:spcPts val="400"/>
-              </a:spcAft>
-              <a:buNone/>
-            </a:pPr>
-            <a:r>
-              <a:rPr lang="en-US" sz="1300" dirty="0">
-                <a:solidFill>
-                  <a:srgbClr val="FFFFFF"/>
-                </a:solidFill>
-                <a:latin typeface="Consolas" pitchFamily="34" charset="0"/>
-                <a:ea typeface="Consolas" pitchFamily="34" charset="-122"/>
-                <a:cs typeface="Consolas" pitchFamily="34" charset="-120"/>
-              </a:rPr>
-              <a:t>cd argos-dev &amp;&amp; .delphi/setup.sh</a:t>
-            </a:r>
-            <a:endParaRPr lang="en-US" sz="1300" dirty="0"/>
-          </a:p>
-          <a:p>
-            <a:pPr indent="0" marL="0">
-              <a:spcAft>
-                <a:spcPts val="400"/>
-              </a:spcAft>
-              <a:buNone/>
-            </a:pPr>
-            <a:r>
-              <a:rPr lang="en-US" sz="1300" dirty="0">
-                <a:solidFill>
-                  <a:srgbClr val="FFFFFF"/>
-                </a:solidFill>
-                <a:latin typeface="Consolas" pitchFamily="34" charset="0"/>
-                <a:ea typeface="Consolas" pitchFamily="34" charset="-122"/>
-                <a:cs typeface="Consolas" pitchFamily="34" charset="-120"/>
-              </a:rPr>
-              <a:t>claude          </a:t>
-            </a:r>
-            <a:pPr indent="0" marL="0">
-              <a:spcAft>
-                <a:spcPts val="400"/>
-              </a:spcAft>
-              <a:buNone/>
-            </a:pPr>
-            <a:r>
-              <a:rPr lang="en-US" sz="1300" dirty="0">
-                <a:solidFill>
-                  <a:srgbClr val="C9932E"/>
-                </a:solidFill>
-                <a:latin typeface="Consolas" pitchFamily="34" charset="0"/>
-                <a:ea typeface="Consolas" pitchFamily="34" charset="-122"/>
-                <a:cs typeface="Consolas" pitchFamily="34" charset="-120"/>
-              </a:rPr>
-              <a:t># then: /implement, /open-pr, …</a:t>
-            </a:r>
-            <a:endParaRPr lang="en-US" sz="1300" dirty="0"/>
-          </a:p>
-        </p:txBody>
-      </p:sp>
-      <p:sp>
-        <p:nvSpPr>
-          <p:cNvPr id="7" name="Text 5"/>
-          <p:cNvSpPr/>
-          <p:nvPr/>
-        </p:nvSpPr>
-        <p:spPr>
-          <a:xfrm>
-            <a:off x="548640" y="4160520"/>
-            <a:ext cx="8046720" cy="365760"/>
-          </a:xfrm>
-          <a:prstGeom prst="rect">
-            <a:avLst/>
-          </a:prstGeom>
-          <a:noFill/>
-          <a:ln/>
-        </p:spPr>
-        <p:txBody>
-          <a:bodyPr wrap="square" lIns="0" tIns="0" rIns="0" bIns="0" rtlCol="0" anchor="ctr"/>
-          <a:lstStyle/>
-          <a:p>
-            <a:pPr indent="0" marL="0">
-              <a:buNone/>
-            </a:pPr>
-            <a:r>
-              <a:rPr lang="en-US" sz="1500" dirty="0">
-                <a:solidFill>
-                  <a:srgbClr val="D5D8DF"/>
-                </a:solidFill>
-                <a:latin typeface="Calibri" pitchFamily="34" charset="0"/>
-                <a:ea typeface="Calibri" pitchFamily="34" charset="-122"/>
-                <a:cs typeface="Calibri" pitchFamily="34" charset="-120"/>
-              </a:rPr>
-              <a:t>Read more on main:  README.md  ·  docs/design.md  ·  docs/goals.md</a:t>
-            </a:r>
-            <a:endParaRPr lang="en-US" sz="1500" dirty="0"/>
+            <a:endParaRPr lang="en-US" sz="2250" dirty="0"/>
           </a:p>
         </p:txBody>
       </p:sp>

--- a/delphi-overview/delphi-overview.pptx
+++ b/delphi-overview/delphi-overview.pptx
@@ -17,9 +17,10 @@
     <p:sldId id="265" r:id="rId11"/>
     <p:sldId id="266" r:id="rId12"/>
     <p:sldId id="267" r:id="rId13"/>
+    <p:sldId id="268" r:id="rId14"/>
   </p:sldIdLst>
   <p:notesMasterIdLst>
-    <p:notesMasterId r:id="rId14"/>
+    <p:notesMasterId r:id="rId15"/>
   </p:notesMasterIdLst>
   <p:sldSz cx="9144000" cy="5143500"/>
   <p:notesSz cx="5143500" cy="9144000"/>
@@ -601,7 +602,7 @@
           <a:p>
             <a:r>
               <a:rPr lang="en-US" dirty="0"/>
-              <a:t>To pull something new in, edit workspace.yml (the setup-workspace skill knows the format) and re-run setup.sh; the new folders appear and stay git-ignored. Because workspace.yml is shared, PR the change into ws/&lt;name&gt; so teammates get it on their next setup. A plugin set takes effect once CI regenerates settings.json on the branch. For a one-off look, add the entry, run setup, then git restore workspace.yml. The entries here are examples.</a:t>
+              <a:t>To pull something new in, edit workspace.yml (the setup-workspace skill knows the format) and re-run setup.sh; the new folders appear and stay git-ignored. A linked workspace is a full clone on its own branch, and setup runs its setup too, so its repos are there as well. Because workspace.yml is shared, PR the change into ws/&lt;name&gt; so teammates get it on their next setup. A plugin set takes effect once CI regenerates settings.json on the branch. For a one-off look, add the entry, run setup, then git restore workspace.yml. The entries here are examples.</a:t>
             </a:r>
             <a:endParaRPr lang="en-US" dirty="0"/>
           </a:p>
@@ -689,7 +690,7 @@
           <a:p>
             <a:r>
               <a:rPr lang="en-US" dirty="0"/>
-              <a:t>When you're unsure where an edit belongs, find the row. The rule underneath: change a thing where it comes from. Workspace files through ws/&lt;name&gt;, shared context and machinery through main, code through its own repo, and personal settings nowhere at all.</a:t>
+              <a:t>You don't need a clone per workspace. In Claude Code, /ws-delphi opens a pane of every workspace, grouped by project, with this clone's marked; pick one and press Switch workspace (or /ws-delphi --web for the same cards in a browser tab). It runs .delphi/switch.sh, which refuses while tracked files have changes, then the checkout hook parks this workspace's folders, its park: list included, in .delphi/parked/&lt;name&gt;/ and brings back the new one's. The new workspace's setup runs: migrations, repos, references, plugins. No restart: skills reload and the mod sends the new CLAUDE.md with your next prompt. The delphi plugin is enabled in every workspace; setup.sh installs it.</a:t>
             </a:r>
             <a:endParaRPr lang="en-US" dirty="0"/>
           </a:p>
@@ -777,7 +778,7 @@
           <a:p>
             <a:r>
               <a:rPr lang="en-US" dirty="0"/>
-              <a:t>Three commands to a ready agent. Clone the workspace branch, run setup once, and start Claude Code at the root; the workspace's skills, glossary and repos are all there. Re-run setup after changing workspace.yml, and use switch.sh to move the same clone to another workspace or to main.</a:t>
+              <a:t>When you're unsure where an edit belongs, find the row. The rule underneath: change a thing where it comes from. Workspace files through ws/&lt;name&gt;, shared context and machinery through main, code through its own repo, and personal settings nowhere at all.</a:t>
             </a:r>
             <a:endParaRPr lang="en-US" dirty="0"/>
           </a:p>
@@ -801,6 +802,94 @@
             <a:fld id="{F7021451-1387-4CA6-816F-3879F97B5CBC}" type="slidenum">
               <a:rPr lang="en-US"/>
               <a:t>12</a:t>
+            </a:fld>
+            <a:endParaRPr lang="en-US"/>
+          </a:p>
+        </p:txBody>
+      </p:sp>
+    </p:spTree>
+    <p:extLst>
+      <p:ext uri="{BB962C8B-B14F-4D97-AF65-F5344CB8AC3E}">
+        <p14:creationId xmlns:p14="http://schemas.microsoft.com/office/powerpoint/2010/main" val="1024086991"/>
+      </p:ext>
+    </p:extLst>
+  </p:cSld>
+  <p:clrMapOvr>
+    <a:masterClrMapping/>
+  </p:clrMapOvr>
+</p:notes>
+</file>
+
+<file path=ppt/notesSlides/notesSlide13.xml><?xml version="1.0" encoding="utf-8"?>
+<p:notes xmlns:a="http://schemas.openxmlformats.org/drawingml/2006/main" xmlns:r="http://schemas.openxmlformats.org/officeDocument/2006/relationships" xmlns:p="http://schemas.openxmlformats.org/presentationml/2006/main">
+  <p:cSld>
+    <p:spTree>
+      <p:nvGrpSpPr>
+        <p:cNvPr id="1" name=""/>
+        <p:cNvGrpSpPr/>
+        <p:nvPr/>
+      </p:nvGrpSpPr>
+      <p:grpSpPr>
+        <a:xfrm>
+          <a:off x="0" y="0"/>
+          <a:ext cx="0" cy="0"/>
+          <a:chOff x="0" y="0"/>
+          <a:chExt cx="0" cy="0"/>
+        </a:xfrm>
+      </p:grpSpPr>
+      <p:sp>
+        <p:nvSpPr>
+          <p:cNvPr id="2" name="Slide Image Placeholder 1"/>
+          <p:cNvSpPr>
+            <a:spLocks noGrp="1" noRot="1" noChangeAspect="1"/>
+          </p:cNvSpPr>
+          <p:nvPr>
+            <p:ph type="sldImg"/>
+          </p:nvPr>
+        </p:nvSpPr>
+        <p:spPr/>
+      </p:sp>
+      <p:sp>
+        <p:nvSpPr>
+          <p:cNvPr id="3" name="Notes Placeholder 2"/>
+          <p:cNvSpPr>
+            <a:spLocks noGrp="1"/>
+          </p:cNvSpPr>
+          <p:nvPr>
+            <p:ph type="body" idx="1"/>
+          </p:nvPr>
+        </p:nvSpPr>
+        <p:spPr/>
+        <p:txBody>
+          <a:bodyPr/>
+          <a:lstStyle/>
+          <a:p>
+            <a:r>
+              <a:rPr lang="en-US" dirty="0"/>
+              <a:t>Three commands to a ready agent. Clone the workspace branch, run setup once, and start Claude Code at the root; the workspace's skills, glossary, repos and plugins are all there. Re-run setup after changing workspace.yml or pulling, and use /ws-delphi (or switch.sh) to move the same clone to another workspace or to main.</a:t>
+            </a:r>
+            <a:endParaRPr lang="en-US" dirty="0"/>
+          </a:p>
+        </p:txBody>
+      </p:sp>
+      <p:sp>
+        <p:nvSpPr>
+          <p:cNvPr id="4" name="Slide Number Placeholder 3"/>
+          <p:cNvSpPr>
+            <a:spLocks noGrp="1"/>
+          </p:cNvSpPr>
+          <p:nvPr>
+            <p:ph type="sldNum" sz="quarter" idx="10"/>
+          </p:nvPr>
+        </p:nvSpPr>
+        <p:spPr/>
+        <p:txBody>
+          <a:bodyPr/>
+          <a:lstStyle/>
+          <a:p>
+            <a:fld id="{F7021451-1387-4CA6-816F-3879F97B5CBC}" type="slidenum">
+              <a:rPr lang="en-US"/>
+              <a:t>13</a:t>
             </a:fld>
             <a:endParaRPr lang="en-US"/>
           </a:p>
@@ -865,7 +954,7 @@
           <a:p>
             <a:r>
               <a:rPr lang="en-US" dirty="0"/>
-              <a:t>Everything is stored once, on Delphi's main branch, as a folder per workspace under software/, laid out like the org chart. For each folder, CI keeps a branch, ws/&lt;name&gt;, whose repo root is that folder, so you clone the branch and the workspace's files sit at their normal places. The workspace's name is just its folder path with workspaces/ removed.</a:t>
+              <a:t>Everything is stored once, on Delphi's main branch, as a folder per workspace under software/, laid out like the org chart. For each folder, CI keeps a branch, ws/&lt;name&gt;, whose repo root is that folder, so you clone the branch and the workspace's files sit at their normal places, with the skills it inherits from the folders above and Delphi's scripts added. The name is each folder's short name, from software/ down, then the workspace's own folder, joined by dots: s.app.argos.argos-dev.</a:t>
             </a:r>
             <a:endParaRPr lang="en-US" dirty="0"/>
           </a:p>
@@ -953,7 +1042,7 @@
           <a:p>
             <a:r>
               <a:rPr lang="en-US" dirty="0"/>
-              <a:t>workspace.yml is the heart of a workspace. Six keys. name and harness say which workspace it is and which agent it's for. The other four each pull something in: plugins are shared skills from the folders above, repos are the code you change, references-git are dependency sources the agent reads, and workspaces are other Delphi branches to read. This is argos-dev's real file, with URLs shortened.</a:t>
+              <a:t>workspace.yml is the heart of a workspace. name and harness say which workspace it is and which agent it's for. plugins are harness plugin sets, like the delphi mod. park lists extra root folders that move aside with the workspace when you switch. The last three each check something out: repos are the code you change, references-git are dependency sources the agent reads, and workspaces are other Delphi workspaces (or main) to read. This is argos-dev's real file, trimmed, with URLs shortened.</a:t>
             </a:r>
             <a:endParaRPr lang="en-US" dirty="0"/>
           </a:p>
@@ -1041,7 +1130,7 @@
           <a:p>
             <a:r>
               <a:rPr lang="en-US" dirty="0"/>
-              <a:t>Two programs read workspace.yml. CI's ci/plugins.sh reads harness and plugins and writes .claude/settings.json, so Claude Code enables the right plugins. Your own .delphi/setup.sh reads repos, references-git and workspaces and checks each out. The checkout hook, park.sh, uses name to keep each workspace's folders apart when you switch. Everything setup makes is git-ignored, so code never shows up as a workspace change.</a:t>
+              <a:t>Two programs read workspace.yml. CI's ci/plugins.sh reads harness and plugins and writes .claude/settings.json, and setup.sh installs exactly the plugins it enables. Your own .delphi/setup.sh reads repos, references-git and workspaces and checks each out; each linked workspace is a full clone on its own branch, pulled and set up on every run. The checkout hook, park.sh, uses name and park to keep each workspace's folders apart when you switch. Everything setup makes is git-ignored, so code never shows up as a workspace change.</a:t>
             </a:r>
             <a:endParaRPr lang="en-US" dirty="0"/>
           </a:p>
@@ -1129,7 +1218,7 @@
           <a:p>
             <a:r>
               <a:rPr lang="en-US" dirty="0"/>
-              <a:t>This is the map to keep in your head. Gold files are the workspace's own: they live in its folder on main and you change them with a PR into ws/&lt;name&gt;. .delphi/ and the CI workflow are Delphi's machinery, shared by every workspace and changed only on main. settings.json is generated, never hand-edited. Plugins aren't in your clone at all: Claude Code installs them from folders higher up on main. Dashed folders are made on your machine by setup.sh, and dotted ones are yours alone.</a:t>
+              <a:t>This is the map to keep in your head. Gold files are the workspace's own: they live in its folder on main and you change them with a PR into ws/&lt;name&gt;. Purple files are inherited: the skills in each workspace-inherit/ folder above, which CI writes onto the branch on every sync, plus plugin sets like the delphi mod, which setup.sh installs. Change those on main. .delphi/ and the CI workflow are Delphi's machinery, shared by every workspace and changed only on main. settings.json is generated, never hand-edited. Dashed folders are made on your machine by setup.sh, and dotted ones are yours alone.</a:t>
             </a:r>
             <a:endParaRPr lang="en-US" dirty="0"/>
           </a:p>
@@ -1217,7 +1306,7 @@
           <a:p>
             <a:r>
               <a:rPr lang="en-US" dirty="0"/>
-              <a:t>Folders above a workspace can share context in three ways, and they behave differently. defaults/ is copied once when the workspace is created, then it's the workspace's own. Plugin sets are one shared copy: CI enables each folder's default set in every workspace below it, and Claude Code keeps it current. And with main under workspaces:, a workspace can read its project folder at linked/main/ whenever it needs to.</a:t>
+              <a:t>Folders above a workspace can share context in three ways, and they behave differently. workspace-defaults/ is copied once when the workspace is created, then it's the workspace's own. workspace-inherit/ is one shared copy on main: on every sync CI writes its files onto the branch of every workspace below that folder, so a fix there reaches all of them, and a workspace that wants its own copy lists the path under opt-out:. Plugin sets are only for what files can't do, like the delphi mod. And with main under workspaces:, a workspace reads its project folder in a clone of main at workspaces/main/.</a:t>
             </a:r>
             <a:endParaRPr lang="en-US" dirty="0"/>
           </a:p>
@@ -1305,7 +1394,7 @@
           <a:p>
             <a:r>
               <a:rPr lang="en-US" dirty="0"/>
-              <a:t>A normal ticket. You clone the workspace and run setup once. /implement makes a worktree for the ticket's branch from origin/develop and works test-first; /run-local serves that worktree; /commit applies the message format; /open-pr runs the checks and opens a draft PR into Argos develop. The skills that guide every step come from the workspace, but the code goes through Argos's own PRs. worktrees/ is git-ignored, so Delphi never sees it.</a:t>
+              <a:t>A normal ticket. You clone the workspace and run setup once. /implement makes a worktree for the ticket's branch from origin/develop and works test-first; /run-local serves that worktree; /commit applies the message format; /open-pr runs the checks and opens a draft PR into Argos develop. The skills that guide every step are inherited from the argos and application-software folders on main, but the code goes through Argos's own PRs. worktrees/ is git-ignored, so Delphi never sees it.</a:t>
             </a:r>
             <a:endParaRPr lang="en-US" dirty="0"/>
           </a:p>
@@ -1393,7 +1482,7 @@
           <a:p>
             <a:r>
               <a:rPr lang="en-US" dirty="0"/>
-              <a:t>Say /implement missed a step. Park the thought with /journal, then fix the skill on a branch of ws/&lt;name&gt; and PR it into ws/&lt;name&gt;, reviewed like code. After it merges, CI proposes it to main as a PR from propose/&lt;name&gt;; check.sh runs on it. Merge that PR with a merge commit or squash, never a rebase. CI then refreshes every workspace branch, and teammates pick it up with git merge origin/ws/&lt;name&gt;.</a:t>
+              <a:t>Say /implement missed a step. Park the thought with /journal, then fix the skill on a branch of ws/&lt;name&gt; and PR it into ws/&lt;name&gt;, reviewed like code. After it merges, CI proposes it to main as a PR from propose/&lt;name&gt;, filled from the PR template and labelled by: ai; check.sh runs on it. Merge that PR with a merge commit or squash, never a rebase. CI then refreshes every workspace branch, and teammates pick it up with git merge origin/ws/&lt;name&gt;. If the fix belongs to many workspaces, make it in a workspace-inherit/ folder on main instead.</a:t>
             </a:r>
             <a:endParaRPr lang="en-US" dirty="0"/>
           </a:p>
@@ -1481,7 +1570,7 @@
           <a:p>
             <a:r>
               <a:rPr lang="en-US" dirty="0"/>
-              <a:t>Both directions are subtree merges done by ci/sync.sh on every push to main or any ws/ branch. Refresh merges main into ws/&lt;name&gt; with the folder mapped to the root; propose does the reverse into propose/&lt;name&gt; and opens the PR. Because they're merges, histories stay joined and edits on both sides meet in a normal three-way merge. Sync also puts main's .delphi/ on every branch and regenerates settings.json, undoing hand edits to either.</a:t>
+              <a:t>Both directions are subtree merges done by ci/sync.sh on every push to main or any ws/ branch. Refresh merges main into ws/&lt;name&gt; with the folder mapped to the root; propose does the reverse into propose/&lt;name&gt; and opens the PR. Because they're merges, histories stay joined and edits on both sides meet in a normal three-way merge. Sync also puts main's .delphi/ and each workspace's inherited files on its branch and regenerates settings.json, undoing hand edits to any of them.</a:t>
             </a:r>
             <a:endParaRPr lang="en-US" dirty="0"/>
           </a:p>
@@ -1856,7 +1945,7 @@
       </p:grpSpPr>
       <p:pic>
         <p:nvPicPr>
-          <p:cNvPr id="2" name="Image 0" descr="/private/tmp/claude-501/-Users-wyattbracy-Desktop-ner-app-software-Delphi/28e5bd69-bc06-4d46-875e-7c63334f5a2a/scratchpad/build/out/pptx/01.png">    </p:cNvPr>
+          <p:cNvPr id="2" name="Image 0" descr="/private/tmp/claude-501/-Users-wyattbracy-Desktop-ner-app-software-Delphi/cc53840f-41cd-43a6-b327-f332f2602565/scratchpad/build/out/pptx/01.png">    </p:cNvPr>
           <p:cNvPicPr>
             <a:picLocks noChangeAspect="1"/>
           </p:cNvPicPr>
@@ -1912,7 +2001,7 @@
       </p:grpSpPr>
       <p:pic>
         <p:nvPicPr>
-          <p:cNvPr id="2" name="Image 0" descr="/private/tmp/claude-501/-Users-wyattbracy-Desktop-ner-app-software-Delphi/28e5bd69-bc06-4d46-875e-7c63334f5a2a/scratchpad/build/out/pptx/10.png">    </p:cNvPr>
+          <p:cNvPr id="2" name="Image 0" descr="/private/tmp/claude-501/-Users-wyattbracy-Desktop-ner-app-software-Delphi/cc53840f-41cd-43a6-b327-f332f2602565/scratchpad/build/out/pptx/10.png">    </p:cNvPr>
           <p:cNvPicPr>
             <a:picLocks noChangeAspect="1"/>
           </p:cNvPicPr>
@@ -2073,7 +2162,168 @@
       </p:grpSpPr>
       <p:pic>
         <p:nvPicPr>
-          <p:cNvPr id="2" name="Image 0" descr="/private/tmp/claude-501/-Users-wyattbracy-Desktop-ner-app-software-Delphi/28e5bd69-bc06-4d46-875e-7c63334f5a2a/scratchpad/build/out/pptx/11.png">    </p:cNvPr>
+          <p:cNvPr id="2" name="Image 0" descr="/private/tmp/claude-501/-Users-wyattbracy-Desktop-ner-app-software-Delphi/cc53840f-41cd-43a6-b327-f332f2602565/scratchpad/build/out/pptx/11.png">    </p:cNvPr>
+          <p:cNvPicPr>
+            <a:picLocks noChangeAspect="1"/>
+          </p:cNvPicPr>
+          <p:nvPr/>
+        </p:nvPicPr>
+        <p:blipFill>
+          <a:blip r:embed="rId1"/>
+          <a:stretch>
+            <a:fillRect/>
+          </a:stretch>
+        </p:blipFill>
+        <p:spPr>
+          <a:xfrm>
+            <a:off x="0" y="0"/>
+            <a:ext cx="9144000" cy="5143500"/>
+          </a:xfrm>
+          <a:prstGeom prst="rect">
+            <a:avLst/>
+          </a:prstGeom>
+        </p:spPr>
+      </p:pic>
+      <p:sp>
+        <p:nvSpPr>
+          <p:cNvPr id="3" name="Shape 0"/>
+          <p:cNvSpPr/>
+          <p:nvPr/>
+        </p:nvSpPr>
+        <p:spPr>
+          <a:xfrm>
+            <a:off x="457200" y="331470"/>
+            <a:ext cx="85725" cy="85725"/>
+          </a:xfrm>
+          <a:prstGeom prst="rect">
+            <a:avLst/>
+          </a:prstGeom>
+          <a:solidFill>
+            <a:srgbClr val="B9821F"/>
+          </a:solidFill>
+          <a:ln w="12700">
+            <a:solidFill>
+              <a:srgbClr val="B9821F"/>
+            </a:solidFill>
+            <a:prstDash val="solid"/>
+          </a:ln>
+        </p:spPr>
+      </p:sp>
+      <p:sp>
+        <p:nvSpPr>
+          <p:cNvPr id="4" name="Text 1"/>
+          <p:cNvSpPr/>
+          <p:nvPr/>
+        </p:nvSpPr>
+        <p:spPr>
+          <a:xfrm>
+            <a:off x="617220" y="297180"/>
+            <a:ext cx="6400800" cy="148590"/>
+          </a:xfrm>
+          <a:prstGeom prst="rect">
+            <a:avLst/>
+          </a:prstGeom>
+          <a:noFill/>
+          <a:ln/>
+        </p:spPr>
+        <p:txBody>
+          <a:bodyPr wrap="square" lIns="0" tIns="0" rIns="0" bIns="0" rtlCol="0" anchor="ctr"/>
+          <a:lstStyle/>
+          <a:p>
+            <a:pPr indent="0" marL="0">
+              <a:buNone/>
+            </a:pPr>
+            <a:r>
+              <a:rPr lang="en-US" sz="810" b="1" spc="160" kern="0" dirty="0">
+                <a:solidFill>
+                  <a:srgbClr val="B9821F"/>
+                </a:solidFill>
+                <a:latin typeface="Helvetica Neue" pitchFamily="34" charset="0"/>
+                <a:ea typeface="Helvetica Neue" pitchFamily="34" charset="-122"/>
+                <a:cs typeface="Helvetica Neue" pitchFamily="34" charset="-120"/>
+              </a:rPr>
+              <a:t>SWITCHING</a:t>
+            </a:r>
+            <a:endParaRPr lang="en-US" sz="810" dirty="0"/>
+          </a:p>
+        </p:txBody>
+      </p:sp>
+      <p:sp>
+        <p:nvSpPr>
+          <p:cNvPr id="5" name="Text 2"/>
+          <p:cNvSpPr/>
+          <p:nvPr/>
+        </p:nvSpPr>
+        <p:spPr>
+          <a:xfrm>
+            <a:off x="457200" y="502920"/>
+            <a:ext cx="8229600" cy="365760"/>
+          </a:xfrm>
+          <a:prstGeom prst="rect">
+            <a:avLst/>
+          </a:prstGeom>
+          <a:noFill/>
+          <a:ln/>
+        </p:spPr>
+        <p:txBody>
+          <a:bodyPr wrap="square" lIns="0" tIns="0" rIns="0" bIns="0" rtlCol="0" anchor="ctr">
+            <a:normAutofit/>
+          </a:bodyPr>
+          <a:lstStyle/>
+          <a:p>
+            <a:pPr indent="0" marL="0">
+              <a:buNone/>
+            </a:pPr>
+            <a:r>
+              <a:rPr lang="en-US" sz="2250" b="1" dirty="0">
+                <a:solidFill>
+                  <a:srgbClr val="1C2230"/>
+                </a:solidFill>
+                <a:latin typeface="Georgia" pitchFamily="34" charset="0"/>
+                <a:ea typeface="Georgia" pitchFamily="34" charset="-122"/>
+                <a:cs typeface="Georgia" pitchFamily="34" charset="-120"/>
+              </a:rPr>
+              <a:t>One clone, any workspace: /ws-delphi</a:t>
+            </a:r>
+            <a:endParaRPr lang="en-US" sz="2250" dirty="0"/>
+          </a:p>
+        </p:txBody>
+      </p:sp>
+    </p:spTree>
+  </p:cSld>
+  <p:clrMapOvr>
+    <a:masterClrMapping/>
+  </p:clrMapOvr>
+</p:sld>
+</file>
+
+<file path=ppt/slides/slide12.xml><?xml version="1.0" encoding="utf-8"?>
+<p:sld xmlns:a="http://schemas.openxmlformats.org/drawingml/2006/main" xmlns:r="http://schemas.openxmlformats.org/officeDocument/2006/relationships" xmlns:p="http://schemas.openxmlformats.org/presentationml/2006/main">
+  <p:cSld name="Slide 12">
+    <p:bg>
+      <p:bgPr>
+        <a:solidFill>
+          <a:srgbClr val="F7F4EE"/>
+        </a:solidFill>
+      </p:bgPr>
+    </p:bg>
+    <p:spTree>
+      <p:nvGrpSpPr>
+        <p:cNvPr id="1" name=""/>
+        <p:cNvGrpSpPr/>
+        <p:nvPr/>
+      </p:nvGrpSpPr>
+      <p:grpSpPr>
+        <a:xfrm>
+          <a:off x="0" y="0"/>
+          <a:ext cx="0" cy="0"/>
+          <a:chOff x="0" y="0"/>
+          <a:chExt cx="0" cy="0"/>
+        </a:xfrm>
+      </p:grpSpPr>
+      <p:pic>
+        <p:nvPicPr>
+          <p:cNvPr id="2" name="Image 0" descr="/private/tmp/claude-501/-Users-wyattbracy-Desktop-ner-app-software-Delphi/cc53840f-41cd-43a6-b327-f332f2602565/scratchpad/build/out/pptx/12.png">    </p:cNvPr>
           <p:cNvPicPr>
             <a:picLocks noChangeAspect="1"/>
           </p:cNvPicPr>
@@ -2208,9 +2458,9 @@
 </p:sld>
 </file>
 
-<file path=ppt/slides/slide12.xml><?xml version="1.0" encoding="utf-8"?>
+<file path=ppt/slides/slide13.xml><?xml version="1.0" encoding="utf-8"?>
 <p:sld xmlns:a="http://schemas.openxmlformats.org/drawingml/2006/main" xmlns:r="http://schemas.openxmlformats.org/officeDocument/2006/relationships" xmlns:p="http://schemas.openxmlformats.org/presentationml/2006/main">
-  <p:cSld name="Slide 12">
+  <p:cSld name="Slide 13">
     <p:bg>
       <p:bgPr>
         <a:solidFill>
@@ -2234,7 +2484,7 @@
       </p:grpSpPr>
       <p:pic>
         <p:nvPicPr>
-          <p:cNvPr id="2" name="Image 0" descr="/private/tmp/claude-501/-Users-wyattbracy-Desktop-ner-app-software-Delphi/28e5bd69-bc06-4d46-875e-7c63334f5a2a/scratchpad/build/out/pptx/12.png">    </p:cNvPr>
+          <p:cNvPr id="2" name="Image 0" descr="/private/tmp/claude-501/-Users-wyattbracy-Desktop-ner-app-software-Delphi/cc53840f-41cd-43a6-b327-f332f2602565/scratchpad/build/out/pptx/13.png">    </p:cNvPr>
           <p:cNvPicPr>
             <a:picLocks noChangeAspect="1"/>
           </p:cNvPicPr>
@@ -2290,7 +2540,7 @@
       </p:grpSpPr>
       <p:pic>
         <p:nvPicPr>
-          <p:cNvPr id="2" name="Image 0" descr="/private/tmp/claude-501/-Users-wyattbracy-Desktop-ner-app-software-Delphi/28e5bd69-bc06-4d46-875e-7c63334f5a2a/scratchpad/build/out/pptx/02.png">    </p:cNvPr>
+          <p:cNvPr id="2" name="Image 0" descr="/private/tmp/claude-501/-Users-wyattbracy-Desktop-ner-app-software-Delphi/cc53840f-41cd-43a6-b327-f332f2602565/scratchpad/build/out/pptx/02.png">    </p:cNvPr>
           <p:cNvPicPr>
             <a:picLocks noChangeAspect="1"/>
           </p:cNvPicPr>
@@ -2451,7 +2701,7 @@
       </p:grpSpPr>
       <p:pic>
         <p:nvPicPr>
-          <p:cNvPr id="2" name="Image 0" descr="/private/tmp/claude-501/-Users-wyattbracy-Desktop-ner-app-software-Delphi/28e5bd69-bc06-4d46-875e-7c63334f5a2a/scratchpad/build/out/pptx/03.png">    </p:cNvPr>
+          <p:cNvPr id="2" name="Image 0" descr="/private/tmp/claude-501/-Users-wyattbracy-Desktop-ner-app-software-Delphi/cc53840f-41cd-43a6-b327-f332f2602565/scratchpad/build/out/pptx/03.png">    </p:cNvPr>
           <p:cNvPicPr>
             <a:picLocks noChangeAspect="1"/>
           </p:cNvPicPr>
@@ -2612,7 +2862,7 @@
       </p:grpSpPr>
       <p:pic>
         <p:nvPicPr>
-          <p:cNvPr id="2" name="Image 0" descr="/private/tmp/claude-501/-Users-wyattbracy-Desktop-ner-app-software-Delphi/28e5bd69-bc06-4d46-875e-7c63334f5a2a/scratchpad/build/out/pptx/04.png">    </p:cNvPr>
+          <p:cNvPr id="2" name="Image 0" descr="/private/tmp/claude-501/-Users-wyattbracy-Desktop-ner-app-software-Delphi/cc53840f-41cd-43a6-b327-f332f2602565/scratchpad/build/out/pptx/04.png">    </p:cNvPr>
           <p:cNvPicPr>
             <a:picLocks noChangeAspect="1"/>
           </p:cNvPicPr>
@@ -2773,7 +3023,7 @@
       </p:grpSpPr>
       <p:pic>
         <p:nvPicPr>
-          <p:cNvPr id="2" name="Image 0" descr="/private/tmp/claude-501/-Users-wyattbracy-Desktop-ner-app-software-Delphi/28e5bd69-bc06-4d46-875e-7c63334f5a2a/scratchpad/build/out/pptx/05.png">    </p:cNvPr>
+          <p:cNvPr id="2" name="Image 0" descr="/private/tmp/claude-501/-Users-wyattbracy-Desktop-ner-app-software-Delphi/cc53840f-41cd-43a6-b327-f332f2602565/scratchpad/build/out/pptx/05.png">    </p:cNvPr>
           <p:cNvPicPr>
             <a:picLocks noChangeAspect="1"/>
           </p:cNvPicPr>
@@ -2934,7 +3184,7 @@
       </p:grpSpPr>
       <p:pic>
         <p:nvPicPr>
-          <p:cNvPr id="2" name="Image 0" descr="/private/tmp/claude-501/-Users-wyattbracy-Desktop-ner-app-software-Delphi/28e5bd69-bc06-4d46-875e-7c63334f5a2a/scratchpad/build/out/pptx/06.png">    </p:cNvPr>
+          <p:cNvPr id="2" name="Image 0" descr="/private/tmp/claude-501/-Users-wyattbracy-Desktop-ner-app-software-Delphi/cc53840f-41cd-43a6-b327-f332f2602565/scratchpad/build/out/pptx/06.png">    </p:cNvPr>
           <p:cNvPicPr>
             <a:picLocks noChangeAspect="1"/>
           </p:cNvPicPr>
@@ -3095,7 +3345,7 @@
       </p:grpSpPr>
       <p:pic>
         <p:nvPicPr>
-          <p:cNvPr id="2" name="Image 0" descr="/private/tmp/claude-501/-Users-wyattbracy-Desktop-ner-app-software-Delphi/28e5bd69-bc06-4d46-875e-7c63334f5a2a/scratchpad/build/out/pptx/07.png">    </p:cNvPr>
+          <p:cNvPr id="2" name="Image 0" descr="/private/tmp/claude-501/-Users-wyattbracy-Desktop-ner-app-software-Delphi/cc53840f-41cd-43a6-b327-f332f2602565/scratchpad/build/out/pptx/07.png">    </p:cNvPr>
           <p:cNvPicPr>
             <a:picLocks noChangeAspect="1"/>
           </p:cNvPicPr>
@@ -3256,7 +3506,7 @@
       </p:grpSpPr>
       <p:pic>
         <p:nvPicPr>
-          <p:cNvPr id="2" name="Image 0" descr="/private/tmp/claude-501/-Users-wyattbracy-Desktop-ner-app-software-Delphi/28e5bd69-bc06-4d46-875e-7c63334f5a2a/scratchpad/build/out/pptx/08.png">    </p:cNvPr>
+          <p:cNvPr id="2" name="Image 0" descr="/private/tmp/claude-501/-Users-wyattbracy-Desktop-ner-app-software-Delphi/cc53840f-41cd-43a6-b327-f332f2602565/scratchpad/build/out/pptx/08.png">    </p:cNvPr>
           <p:cNvPicPr>
             <a:picLocks noChangeAspect="1"/>
           </p:cNvPicPr>
@@ -3417,7 +3667,7 @@
       </p:grpSpPr>
       <p:pic>
         <p:nvPicPr>
-          <p:cNvPr id="2" name="Image 0" descr="/private/tmp/claude-501/-Users-wyattbracy-Desktop-ner-app-software-Delphi/28e5bd69-bc06-4d46-875e-7c63334f5a2a/scratchpad/build/out/pptx/09.png">    </p:cNvPr>
+          <p:cNvPr id="2" name="Image 0" descr="/private/tmp/claude-501/-Users-wyattbracy-Desktop-ner-app-software-Delphi/cc53840f-41cd-43a6-b327-f332f2602565/scratchpad/build/out/pptx/09.png">    </p:cNvPr>
           <p:cNvPicPr>
             <a:picLocks noChangeAspect="1"/>
           </p:cNvPicPr>

--- a/delphi-overview/delphi-overview.pptx
+++ b/delphi-overview/delphi-overview.pptx
@@ -1130,7 +1130,7 @@
           <a:p>
             <a:r>
               <a:rPr lang="en-US" dirty="0"/>
-              <a:t>Two programs read workspace.yml. CI's ci/plugins.sh reads harness and plugins and writes .claude/settings.json, and setup.sh installs exactly the plugins it enables. Your own .delphi/setup.sh reads repos, references-git and workspaces and checks each out; each linked workspace is a full clone on its own branch, pulled and set up on every run. The checkout hook, park.sh, uses name and park to keep each workspace's folders apart when you switch. Everything setup makes is git-ignored, so code never shows up as a workspace change.</a:t>
+              <a:t>Two programs read workspace.yml. CI's ci/plugins.sh reads harness and plugins and writes .claude/settings.json, and setup.sh installs exactly the plugins it enables. Your own .delphi/setup.sh reads repos, references-git and workspaces and checks each out. Each repo gets a plain clone at repos/&lt;name&gt;, on its default branch, for working on one thing at a time, and separately a bare store at worktrees/&lt;name&gt;/.bare with the default branch checked out beside it, which agents' worktrees come from; each linked workspace is a full clone on its own branch, pulled and set up on every run. The checkout hook, park.sh, uses name and park to keep each workspace's folders apart when you switch. Everything setup makes is git-ignored, so code never shows up as a workspace change.</a:t>
             </a:r>
             <a:endParaRPr lang="en-US" dirty="0"/>
           </a:p>
@@ -1394,7 +1394,7 @@
           <a:p>
             <a:r>
               <a:rPr lang="en-US" dirty="0"/>
-              <a:t>A normal ticket. You clone the workspace and run setup once. /implement makes a worktree for the ticket's branch from origin/develop and works test-first; /run-local serves that worktree; /commit applies the message format; /open-pr runs the checks and opens a draft PR into Argos develop. The skills that guide every step are inherited from the argos and application-software folders on main, but the code goes through Argos's own PRs. worktrees/ is git-ignored, so Delphi never sees it.</a:t>
+              <a:t>A normal ticket. You clone the workspace and run setup once. Agents work in worktrees, all made from worktrees/argos/.bare; the plain clone at repos/argos is yours, for one thing at a time. /implement makes a worktree for the ticket's branch from origin/develop and works test-first; /run-local serves that worktree; /commit applies the message format; /open-pr runs the checks, offers screenshots or a video for a UI change, and opens a draft PR into Argos develop. The skills that guide every step are inherited from the argos and application-software folders on main, but the code goes through Argos's own PRs. worktrees/ is git-ignored, so Delphi never sees it.</a:t>
             </a:r>
             <a:endParaRPr lang="en-US" dirty="0"/>
           </a:p>
